--- a/assets/figures-editable/c3-c4/c3-e25.pptx
+++ b/assets/figures-editable/c3-c4/c3-e25.pptx
@@ -3104,8 +3104,8 @@
         </p:nvSpPr>
         <p:spPr>
           <a:xfrm>
-            <a:off x="274320" y="137160"/>
-            <a:ext cx="11612880" cy="365760"/>
+            <a:off x="274320" y="118872"/>
+            <a:ext cx="11612880" cy="340105"/>
           </a:xfrm>
           <a:prstGeom prst="rect">
             <a:avLst/>
@@ -3114,7 +3114,7 @@
           <a:effectLst/>
         </p:spPr>
         <p:txBody>
-          <a:bodyPr wrap="square" lIns="27432" rIns="27432" tIns="18288" bIns="18288" anchor="ctr">
+          <a:bodyPr wrap="none" lIns="18288" rIns="18288" tIns="18288" bIns="18288" anchor="t">
             <a:spAutoFit/>
           </a:bodyPr>
           <a:lstStyle/>
@@ -3125,7 +3125,7 @@
               </a:spcAft>
             </a:pPr>
             <a:r>
-              <a:rPr sz="2100" b="0" i="0">
+              <a:rPr sz="1900" b="1" i="0">
                 <a:solidFill>
                   <a:srgbClr val="8EDBD4"/>
                 </a:solidFill>
@@ -3136,23 +3136,20 @@
           </a:p>
         </p:txBody>
       </p:sp>
-      <p:sp>
-        <p:nvSpPr>
-          <p:cNvPr id="3" name="C3-E25 rect 1" descr="sci-ppt:o001"/>
-          <p:cNvSpPr/>
+      <p:cxnSp>
+        <p:nvCxnSpPr>
+          <p:cNvPr id="3" name="C3-E25 line 1" descr="sci-ppt:o001"/>
+          <p:cNvCxnSpPr/>
           <p:nvPr/>
-        </p:nvSpPr>
+        </p:nvCxnSpPr>
         <p:spPr>
           <a:xfrm>
-            <a:off x="731520" y="1508760"/>
-            <a:ext cx="4937760" cy="731520"/>
+            <a:off x="914400" y="4937760"/>
+            <a:ext cx="6400800" cy="0"/>
           </a:xfrm>
-          <a:prstGeom prst="rect">
+          <a:prstGeom prst="line">
             <a:avLst/>
           </a:prstGeom>
-          <a:solidFill>
-            <a:srgbClr val="213E4B"/>
-          </a:solidFill>
           <a:ln w="19050">
             <a:solidFill>
               <a:srgbClr val="B4C7D2"/>
@@ -3160,78 +3157,51 @@
           </a:ln>
           <a:effectLst/>
         </p:spPr>
-        <p:txBody>
-          <a:bodyPr rtlCol="0" anchor="ctr"/>
-          <a:lstStyle/>
-          <a:p>
-            <a:pPr algn="ctr"/>
-          </a:p>
-        </p:txBody>
-      </p:sp>
+      </p:cxnSp>
       <p:cxnSp>
         <p:nvCxnSpPr>
-          <p:cNvPr id="4" name="C3-E25 arrow 2" descr="sci-ppt:o002"/>
+          <p:cNvPr id="4" name="C3-E25 line 2" descr="sci-ppt:o002"/>
           <p:cNvCxnSpPr/>
           <p:nvPr/>
         </p:nvCxnSpPr>
         <p:spPr>
           <a:xfrm>
-            <a:off x="1005840" y="1874519"/>
-            <a:ext cx="4297680" cy="0"/>
+            <a:off x="914400" y="1371600"/>
+            <a:ext cx="0" cy="3566160"/>
           </a:xfrm>
           <a:prstGeom prst="line">
             <a:avLst/>
           </a:prstGeom>
-          <a:ln w="25400">
+          <a:ln w="19050">
             <a:solidFill>
-              <a:srgbClr val="8EDBD4"/>
+              <a:srgbClr val="B4C7D2"/>
             </a:solidFill>
-            <a:headEnd type="none" w="med" len="med"/>
-            <a:tailEnd type="triangle" w="med" len="med"/>
           </a:ln>
           <a:effectLst/>
         </p:spPr>
       </p:cxnSp>
-      <p:sp>
-        <p:nvSpPr>
-          <p:cNvPr id="5" name="C3-E25 text 3" descr="sci-ppt:o003"/>
-          <p:cNvSpPr txBox="1"/>
+      <p:cxnSp>
+        <p:nvCxnSpPr>
+          <p:cNvPr id="5" name="C3-E25 line 3" descr="sci-ppt:o003"/>
+          <p:cNvCxnSpPr/>
           <p:nvPr/>
-        </p:nvSpPr>
+        </p:nvCxnSpPr>
         <p:spPr>
           <a:xfrm>
-            <a:off x="1463040" y="1051560"/>
-            <a:ext cx="3931920" cy="365760"/>
+            <a:off x="914400" y="4937760"/>
+            <a:ext cx="0" cy="64008"/>
           </a:xfrm>
-          <a:prstGeom prst="rect">
+          <a:prstGeom prst="line">
             <a:avLst/>
           </a:prstGeom>
-          <a:noFill/>
+          <a:ln w="12700">
+            <a:solidFill>
+              <a:srgbClr val="B4C7D2"/>
+            </a:solidFill>
+          </a:ln>
           <a:effectLst/>
         </p:spPr>
-        <p:txBody>
-          <a:bodyPr wrap="square" lIns="27432" rIns="27432" tIns="18288" bIns="18288" anchor="ctr">
-            <a:spAutoFit/>
-          </a:bodyPr>
-          <a:lstStyle/>
-          <a:p>
-            <a:pPr algn="l">
-              <a:spcAft>
-                <a:spcPts val="0"/>
-              </a:spcAft>
-            </a:pPr>
-            <a:r>
-              <a:rPr sz="1800" b="0" i="0">
-                <a:solidFill>
-                  <a:srgbClr val="E7F0F3"/>
-                </a:solidFill>
-                <a:latin typeface="Arial"/>
-              </a:rPr>
-              <a:t>Finite emitted liquid: m_j, E_j, U_j</a:t>
-            </a:r>
-          </a:p>
-        </p:txBody>
-      </p:sp>
+      </p:cxnSp>
       <p:cxnSp>
         <p:nvCxnSpPr>
           <p:cNvPr id="6" name="C3-E25 line 4" descr="sci-ppt:o004"/>
@@ -3240,15 +3210,15 @@
         </p:nvCxnSpPr>
         <p:spPr>
           <a:xfrm>
-            <a:off x="731520" y="2606040"/>
-            <a:ext cx="4937760" cy="0"/>
+            <a:off x="914400" y="1371600"/>
+            <a:ext cx="0" cy="3566160"/>
           </a:xfrm>
           <a:prstGeom prst="line">
             <a:avLst/>
           </a:prstGeom>
-          <a:ln w="25400">
+          <a:ln w="7620">
             <a:solidFill>
-              <a:srgbClr val="8EDBD4"/>
+              <a:srgbClr val="2E4756"/>
             </a:solidFill>
           </a:ln>
           <a:effectLst/>
@@ -3262,8 +3232,8 @@
         </p:nvSpPr>
         <p:spPr>
           <a:xfrm>
-            <a:off x="2743200" y="2697480"/>
-            <a:ext cx="1828800" cy="365760"/>
+            <a:off x="457200" y="5020056"/>
+            <a:ext cx="914400" cy="208407"/>
           </a:xfrm>
           <a:prstGeom prst="rect">
             <a:avLst/>
@@ -3272,24 +3242,24 @@
           <a:effectLst/>
         </p:spPr>
         <p:txBody>
-          <a:bodyPr wrap="square" lIns="27432" rIns="27432" tIns="18288" bIns="18288" anchor="ctr">
+          <a:bodyPr wrap="none" lIns="18288" rIns="18288" tIns="18288" bIns="18288" anchor="t">
             <a:spAutoFit/>
           </a:bodyPr>
           <a:lstStyle/>
           <a:p>
-            <a:pPr algn="l">
+            <a:pPr algn="ctr">
               <a:spcAft>
                 <a:spcPts val="0"/>
               </a:spcAft>
             </a:pPr>
             <a:r>
-              <a:rPr sz="1700" b="0" i="0">
+              <a:rPr sz="1050" b="0" i="0">
                 <a:solidFill>
-                  <a:srgbClr val="E7F0F3"/>
+                  <a:srgbClr val="B4C7D2"/>
                 </a:solidFill>
                 <a:latin typeface="Arial"/>
               </a:rPr>
-              <a:t>L_j</a:t>
+              <a:t>0</a:t>
             </a:r>
           </a:p>
         </p:txBody>
@@ -3302,30 +3272,52 @@
         </p:nvCxnSpPr>
         <p:spPr>
           <a:xfrm>
-            <a:off x="457200" y="1508760"/>
-            <a:ext cx="0" cy="731520"/>
+            <a:off x="2336800" y="4937760"/>
+            <a:ext cx="0" cy="64008"/>
           </a:xfrm>
           <a:prstGeom prst="line">
             <a:avLst/>
           </a:prstGeom>
-          <a:ln w="25400">
+          <a:ln w="12700">
             <a:solidFill>
-              <a:srgbClr val="8EDBD4"/>
+              <a:srgbClr val="B4C7D2"/>
             </a:solidFill>
           </a:ln>
           <a:effectLst/>
         </p:spPr>
       </p:cxnSp>
-      <p:sp>
-        <p:nvSpPr>
-          <p:cNvPr id="9" name="C3-E25 text 7" descr="sci-ppt:o007"/>
+      <p:cxnSp>
+        <p:nvCxnSpPr>
+          <p:cNvPr id="9" name="C3-E25 line 7" descr="sci-ppt:o007"/>
+          <p:cNvCxnSpPr/>
+          <p:nvPr/>
+        </p:nvCxnSpPr>
+        <p:spPr>
+          <a:xfrm>
+            <a:off x="2336800" y="1371600"/>
+            <a:ext cx="0" cy="3566160"/>
+          </a:xfrm>
+          <a:prstGeom prst="line">
+            <a:avLst/>
+          </a:prstGeom>
+          <a:ln w="7620">
+            <a:solidFill>
+              <a:srgbClr val="2E4756"/>
+            </a:solidFill>
+          </a:ln>
+          <a:effectLst/>
+        </p:spPr>
+      </p:cxnSp>
+      <p:sp>
+        <p:nvSpPr>
+          <p:cNvPr id="10" name="C3-E25 text 8" descr="sci-ppt:o008"/>
           <p:cNvSpPr txBox="1"/>
           <p:nvPr/>
         </p:nvSpPr>
         <p:spPr>
           <a:xfrm>
-            <a:off x="137160" y="2377440"/>
-            <a:ext cx="1645920" cy="320040"/>
+            <a:off x="1879599" y="5020056"/>
+            <a:ext cx="914400" cy="208407"/>
           </a:xfrm>
           <a:prstGeom prst="rect">
             <a:avLst/>
@@ -3334,94 +3326,82 @@
           <a:effectLst/>
         </p:spPr>
         <p:txBody>
-          <a:bodyPr wrap="square" lIns="27432" rIns="27432" tIns="18288" bIns="18288" anchor="ctr">
+          <a:bodyPr wrap="none" lIns="18288" rIns="18288" tIns="18288" bIns="18288" anchor="t">
             <a:spAutoFit/>
           </a:bodyPr>
           <a:lstStyle/>
           <a:p>
-            <a:pPr algn="l">
+            <a:pPr algn="ctr">
               <a:spcAft>
                 <a:spcPts val="0"/>
               </a:spcAft>
             </a:pPr>
             <a:r>
-              <a:rPr sz="1400" b="0" i="0">
+              <a:rPr sz="1050" b="0" i="0">
                 <a:solidFill>
-                  <a:srgbClr val="E7F0F3"/>
+                  <a:srgbClr val="B4C7D2"/>
                 </a:solidFill>
                 <a:latin typeface="Arial"/>
               </a:rPr>
-              <a:t>d_j = 2a_j</a:t>
-            </a:r>
-          </a:p>
-        </p:txBody>
-      </p:sp>
-      <p:sp>
-        <p:nvSpPr>
-          <p:cNvPr id="10" name="C3-E25 rect 8" descr="sci-ppt:o008"/>
-          <p:cNvSpPr/>
+              <a:t>10</a:t>
+            </a:r>
+          </a:p>
+        </p:txBody>
+      </p:sp>
+      <p:cxnSp>
+        <p:nvCxnSpPr>
+          <p:cNvPr id="11" name="C3-E25 line 9" descr="sci-ppt:o009"/>
+          <p:cNvCxnSpPr/>
           <p:nvPr/>
-        </p:nvSpPr>
+        </p:nvCxnSpPr>
         <p:spPr>
           <a:xfrm>
-            <a:off x="8412480" y="960120"/>
-            <a:ext cx="365760" cy="1645920"/>
+            <a:off x="3759199" y="4937760"/>
+            <a:ext cx="0" cy="64008"/>
           </a:xfrm>
-          <a:prstGeom prst="rect">
+          <a:prstGeom prst="line">
             <a:avLst/>
           </a:prstGeom>
-          <a:solidFill>
-            <a:srgbClr val="213E4B"/>
-          </a:solidFill>
-          <a:ln w="19050">
+          <a:ln w="12700">
             <a:solidFill>
               <a:srgbClr val="B4C7D2"/>
             </a:solidFill>
           </a:ln>
           <a:effectLst/>
         </p:spPr>
-        <p:txBody>
-          <a:bodyPr rtlCol="0" anchor="ctr"/>
-          <a:lstStyle/>
-          <a:p>
-            <a:pPr algn="ctr"/>
-          </a:p>
-        </p:txBody>
-      </p:sp>
+      </p:cxnSp>
       <p:cxnSp>
         <p:nvCxnSpPr>
-          <p:cNvPr id="11" name="C3-E25 arrow 9" descr="sci-ppt:o009"/>
+          <p:cNvPr id="12" name="C3-E25 line 10" descr="sci-ppt:o010"/>
           <p:cNvCxnSpPr/>
           <p:nvPr/>
         </p:nvCxnSpPr>
         <p:spPr>
           <a:xfrm>
-            <a:off x="5760720" y="1874519"/>
-            <a:ext cx="2606040" cy="0"/>
+            <a:off x="3759199" y="1371600"/>
+            <a:ext cx="0" cy="3566160"/>
           </a:xfrm>
           <a:prstGeom prst="line">
             <a:avLst/>
           </a:prstGeom>
-          <a:ln w="25400">
+          <a:ln w="7620">
             <a:solidFill>
-              <a:srgbClr val="8EDBD4"/>
+              <a:srgbClr val="2E4756"/>
             </a:solidFill>
-            <a:headEnd type="none" w="med" len="med"/>
-            <a:tailEnd type="triangle" w="med" len="med"/>
           </a:ln>
           <a:effectLst/>
         </p:spPr>
       </p:cxnSp>
       <p:sp>
         <p:nvSpPr>
-          <p:cNvPr id="12" name="C3-E25 text 10" descr="sci-ppt:o010"/>
+          <p:cNvPr id="13" name="C3-E25 text 11" descr="sci-ppt:o011"/>
           <p:cNvSpPr txBox="1"/>
           <p:nvPr/>
         </p:nvSpPr>
         <p:spPr>
           <a:xfrm>
-            <a:off x="9006840" y="1005840"/>
-            <a:ext cx="2743200" cy="548640"/>
+            <a:off x="3301999" y="5020056"/>
+            <a:ext cx="914400" cy="208407"/>
           </a:xfrm>
           <a:prstGeom prst="rect">
             <a:avLst/>
@@ -3430,96 +3410,24 @@
           <a:effectLst/>
         </p:spPr>
         <p:txBody>
-          <a:bodyPr wrap="square" lIns="27432" rIns="27432" tIns="18288" bIns="18288" anchor="ctr">
+          <a:bodyPr wrap="none" lIns="18288" rIns="18288" tIns="18288" bIns="18288" anchor="t">
             <a:spAutoFit/>
           </a:bodyPr>
           <a:lstStyle/>
           <a:p>
-            <a:pPr algn="l">
+            <a:pPr algn="ctr">
               <a:spcAft>
                 <a:spcPts val="0"/>
               </a:spcAft>
             </a:pPr>
             <a:r>
-              <a:rPr sz="1800" b="0" i="0">
+              <a:rPr sz="1050" b="0" i="0">
                 <a:solidFill>
-                  <a:srgbClr val="E7F0F3"/>
+                  <a:srgbClr val="B4C7D2"/>
                 </a:solidFill>
                 <a:latin typeface="Arial"/>
               </a:rPr>
-              <a:t>Receiver</a:t>
-            </a:r>
-          </a:p>
-          <a:p>
-            <a:pPr algn="l">
-              <a:spcAft>
-                <a:spcPts val="0"/>
-              </a:spcAft>
-            </a:pPr>
-            <a:r>
-              <a:rPr sz="1800" b="0" i="0">
-                <a:solidFill>
-                  <a:srgbClr val="E7F0F3"/>
-                </a:solidFill>
-                <a:latin typeface="Arial"/>
-              </a:rPr>
-              <a:t>Z_r, v_i</a:t>
-            </a:r>
-          </a:p>
-        </p:txBody>
-      </p:sp>
-      <p:sp>
-        <p:nvSpPr>
-          <p:cNvPr id="13" name="C3-E25 text 11" descr="sci-ppt:o011"/>
-          <p:cNvSpPr txBox="1"/>
-          <p:nvPr/>
-        </p:nvSpPr>
-        <p:spPr>
-          <a:xfrm>
-            <a:off x="6035040" y="2880360"/>
-            <a:ext cx="5394960" cy="731520"/>
-          </a:xfrm>
-          <a:prstGeom prst="rect">
-            <a:avLst/>
-          </a:prstGeom>
-          <a:noFill/>
-          <a:effectLst/>
-        </p:spPr>
-        <p:txBody>
-          <a:bodyPr wrap="square" lIns="27432" rIns="27432" tIns="18288" bIns="18288" anchor="ctr">
-            <a:spAutoFit/>
-          </a:bodyPr>
-          <a:lstStyle/>
-          <a:p>
-            <a:pPr algn="l">
-              <a:spcAft>
-                <a:spcPts val="0"/>
-              </a:spcAft>
-            </a:pPr>
-            <a:r>
-              <a:rPr sz="1700" b="0" i="0">
-                <a:solidFill>
-                  <a:srgbClr val="8EDBD4"/>
-                </a:solidFill>
-                <a:latin typeface="Arial"/>
-              </a:rPr>
-              <a:t>Early pressure: acoustic matching</a:t>
-            </a:r>
-          </a:p>
-          <a:p>
-            <a:pPr algn="l">
-              <a:spcAft>
-                <a:spcPts val="0"/>
-              </a:spcAft>
-            </a:pPr>
-            <a:r>
-              <a:rPr sz="1700" b="0" i="0">
-                <a:solidFill>
-                  <a:srgbClr val="8EDBD4"/>
-                </a:solidFill>
-                <a:latin typeface="Arial"/>
-              </a:rPr>
-              <a:t>Impulse: finite momentum change</a:t>
+              <a:t>20</a:t>
             </a:r>
           </a:p>
         </p:txBody>
@@ -3532,30 +3440,52 @@
         </p:nvCxnSpPr>
         <p:spPr>
           <a:xfrm>
-            <a:off x="274320" y="3977639"/>
-            <a:ext cx="11612880" cy="0"/>
+            <a:off x="5181599" y="4937760"/>
+            <a:ext cx="0" cy="64008"/>
           </a:xfrm>
           <a:prstGeom prst="line">
             <a:avLst/>
           </a:prstGeom>
           <a:ln w="12700">
             <a:solidFill>
-              <a:srgbClr val="405967"/>
+              <a:srgbClr val="B4C7D2"/>
             </a:solidFill>
           </a:ln>
           <a:effectLst/>
         </p:spPr>
       </p:cxnSp>
-      <p:sp>
-        <p:nvSpPr>
-          <p:cNvPr id="15" name="C3-E25 text 13" descr="sci-ppt:o013"/>
+      <p:cxnSp>
+        <p:nvCxnSpPr>
+          <p:cNvPr id="15" name="C3-E25 line 13" descr="sci-ppt:o013"/>
+          <p:cNvCxnSpPr/>
+          <p:nvPr/>
+        </p:nvCxnSpPr>
+        <p:spPr>
+          <a:xfrm>
+            <a:off x="5181599" y="1371600"/>
+            <a:ext cx="0" cy="3566160"/>
+          </a:xfrm>
+          <a:prstGeom prst="line">
+            <a:avLst/>
+          </a:prstGeom>
+          <a:ln w="7620">
+            <a:solidFill>
+              <a:srgbClr val="2E4756"/>
+            </a:solidFill>
+          </a:ln>
+          <a:effectLst/>
+        </p:spPr>
+      </p:cxnSp>
+      <p:sp>
+        <p:nvSpPr>
+          <p:cNvPr id="16" name="C3-E25 text 14" descr="sci-ppt:o014"/>
           <p:cNvSpPr txBox="1"/>
           <p:nvPr/>
         </p:nvSpPr>
         <p:spPr>
           <a:xfrm>
-            <a:off x="320040" y="4096512"/>
-            <a:ext cx="5715000" cy="246888"/>
+            <a:off x="4724399" y="5020056"/>
+            <a:ext cx="914400" cy="208407"/>
           </a:xfrm>
           <a:prstGeom prst="rect">
             <a:avLst/>
@@ -3564,38 +3494,82 @@
           <a:effectLst/>
         </p:spPr>
         <p:txBody>
-          <a:bodyPr wrap="square" lIns="27432" rIns="27432" tIns="18288" bIns="18288" anchor="ctr">
+          <a:bodyPr wrap="none" lIns="18288" rIns="18288" tIns="18288" bIns="18288" anchor="t">
             <a:spAutoFit/>
           </a:bodyPr>
           <a:lstStyle/>
           <a:p>
-            <a:pPr algn="l">
+            <a:pPr algn="ctr">
               <a:spcAft>
                 <a:spcPts val="0"/>
               </a:spcAft>
             </a:pPr>
             <a:r>
-              <a:rPr sz="1150" b="0" i="0">
+              <a:rPr sz="1050" b="0" i="0">
                 <a:solidFill>
                   <a:srgbClr val="B4C7D2"/>
                 </a:solidFill>
                 <a:latin typeface="Arial"/>
               </a:rPr>
-              <a:t>• m_j, U_j → P_in</a:t>
-            </a:r>
-          </a:p>
-        </p:txBody>
-      </p:sp>
-      <p:sp>
-        <p:nvSpPr>
-          <p:cNvPr id="16" name="C3-E25 text 14" descr="sci-ppt:o014"/>
+              <a:t>30</a:t>
+            </a:r>
+          </a:p>
+        </p:txBody>
+      </p:sp>
+      <p:cxnSp>
+        <p:nvCxnSpPr>
+          <p:cNvPr id="17" name="C3-E25 line 15" descr="sci-ppt:o015"/>
+          <p:cNvCxnSpPr/>
+          <p:nvPr/>
+        </p:nvCxnSpPr>
+        <p:spPr>
+          <a:xfrm>
+            <a:off x="6603999" y="4937760"/>
+            <a:ext cx="0" cy="64008"/>
+          </a:xfrm>
+          <a:prstGeom prst="line">
+            <a:avLst/>
+          </a:prstGeom>
+          <a:ln w="12700">
+            <a:solidFill>
+              <a:srgbClr val="B4C7D2"/>
+            </a:solidFill>
+          </a:ln>
+          <a:effectLst/>
+        </p:spPr>
+      </p:cxnSp>
+      <p:cxnSp>
+        <p:nvCxnSpPr>
+          <p:cNvPr id="18" name="C3-E25 line 16" descr="sci-ppt:o016"/>
+          <p:cNvCxnSpPr/>
+          <p:nvPr/>
+        </p:nvCxnSpPr>
+        <p:spPr>
+          <a:xfrm>
+            <a:off x="6603999" y="1371600"/>
+            <a:ext cx="0" cy="3566160"/>
+          </a:xfrm>
+          <a:prstGeom prst="line">
+            <a:avLst/>
+          </a:prstGeom>
+          <a:ln w="7620">
+            <a:solidFill>
+              <a:srgbClr val="2E4756"/>
+            </a:solidFill>
+          </a:ln>
+          <a:effectLst/>
+        </p:spPr>
+      </p:cxnSp>
+      <p:sp>
+        <p:nvSpPr>
+          <p:cNvPr id="19" name="C3-E25 text 17" descr="sci-ppt:o017"/>
           <p:cNvSpPr txBox="1"/>
           <p:nvPr/>
         </p:nvSpPr>
         <p:spPr>
           <a:xfrm>
-            <a:off x="6217920" y="4096512"/>
-            <a:ext cx="5715000" cy="246888"/>
+            <a:off x="6146799" y="5020056"/>
+            <a:ext cx="914400" cy="208407"/>
           </a:xfrm>
           <a:prstGeom prst="rect">
             <a:avLst/>
@@ -3604,38 +3578,104 @@
           <a:effectLst/>
         </p:spPr>
         <p:txBody>
-          <a:bodyPr wrap="square" lIns="27432" rIns="27432" tIns="18288" bIns="18288" anchor="ctr">
+          <a:bodyPr wrap="none" lIns="18288" rIns="18288" tIns="18288" bIns="18288" anchor="t">
             <a:spAutoFit/>
           </a:bodyPr>
           <a:lstStyle/>
           <a:p>
-            <a:pPr algn="l">
+            <a:pPr algn="ctr">
               <a:spcAft>
                 <a:spcPts val="0"/>
               </a:spcAft>
             </a:pPr>
             <a:r>
-              <a:rPr sz="1150" b="0" i="0">
+              <a:rPr sz="1050" b="0" i="0">
                 <a:solidFill>
                   <a:srgbClr val="B4C7D2"/>
                 </a:solidFill>
                 <a:latin typeface="Arial"/>
               </a:rPr>
-              <a:t>• P_out after redirection or rebound</a:t>
-            </a:r>
-          </a:p>
-        </p:txBody>
-      </p:sp>
-      <p:sp>
-        <p:nvSpPr>
-          <p:cNvPr id="17" name="C3-E25 text 15" descr="sci-ppt:o015"/>
+              <a:t>40</a:t>
+            </a:r>
+          </a:p>
+        </p:txBody>
+      </p:sp>
+      <p:cxnSp>
+        <p:nvCxnSpPr>
+          <p:cNvPr id="20" name="C3-E25 line 18" descr="sci-ppt:o018"/>
+          <p:cNvCxnSpPr/>
+          <p:nvPr/>
+        </p:nvCxnSpPr>
+        <p:spPr>
+          <a:xfrm>
+            <a:off x="850392" y="4937760"/>
+            <a:ext cx="64008" cy="0"/>
+          </a:xfrm>
+          <a:prstGeom prst="line">
+            <a:avLst/>
+          </a:prstGeom>
+          <a:ln w="12700">
+            <a:solidFill>
+              <a:srgbClr val="B4C7D2"/>
+            </a:solidFill>
+          </a:ln>
+          <a:effectLst/>
+        </p:spPr>
+      </p:cxnSp>
+      <p:cxnSp>
+        <p:nvCxnSpPr>
+          <p:cNvPr id="21" name="C3-E25 line 19" descr="sci-ppt:o019"/>
+          <p:cNvCxnSpPr/>
+          <p:nvPr/>
+        </p:nvCxnSpPr>
+        <p:spPr>
+          <a:xfrm>
+            <a:off x="850392" y="3451860"/>
+            <a:ext cx="64008" cy="0"/>
+          </a:xfrm>
+          <a:prstGeom prst="line">
+            <a:avLst/>
+          </a:prstGeom>
+          <a:ln w="12700">
+            <a:solidFill>
+              <a:srgbClr val="B4C7D2"/>
+            </a:solidFill>
+          </a:ln>
+          <a:effectLst/>
+        </p:spPr>
+      </p:cxnSp>
+      <p:cxnSp>
+        <p:nvCxnSpPr>
+          <p:cNvPr id="22" name="C3-E25 line 20" descr="sci-ppt:o020"/>
+          <p:cNvCxnSpPr/>
+          <p:nvPr/>
+        </p:nvCxnSpPr>
+        <p:spPr>
+          <a:xfrm>
+            <a:off x="914400" y="3451860"/>
+            <a:ext cx="6400800" cy="0"/>
+          </a:xfrm>
+          <a:prstGeom prst="line">
+            <a:avLst/>
+          </a:prstGeom>
+          <a:ln w="7620">
+            <a:solidFill>
+              <a:srgbClr val="2E4756"/>
+            </a:solidFill>
+          </a:ln>
+          <a:effectLst/>
+        </p:spPr>
+      </p:cxnSp>
+      <p:sp>
+        <p:nvSpPr>
+          <p:cNvPr id="23" name="C3-E25 text 21" descr="sci-ppt:o021"/>
           <p:cNvSpPr txBox="1"/>
           <p:nvPr/>
         </p:nvSpPr>
         <p:spPr>
           <a:xfrm>
-            <a:off x="320040" y="4329684"/>
-            <a:ext cx="5715000" cy="246888"/>
+            <a:off x="45720" y="3369564"/>
+            <a:ext cx="777240" cy="208407"/>
           </a:xfrm>
           <a:prstGeom prst="rect">
             <a:avLst/>
@@ -3644,38 +3684,82 @@
           <a:effectLst/>
         </p:spPr>
         <p:txBody>
-          <a:bodyPr wrap="square" lIns="27432" rIns="27432" tIns="18288" bIns="18288" anchor="ctr">
+          <a:bodyPr wrap="none" lIns="18288" rIns="18288" tIns="18288" bIns="18288" anchor="t">
             <a:spAutoFit/>
           </a:bodyPr>
           <a:lstStyle/>
           <a:p>
-            <a:pPr algn="l">
+            <a:pPr algn="r">
               <a:spcAft>
                 <a:spcPts val="0"/>
               </a:spcAft>
             </a:pPr>
             <a:r>
-              <a:rPr sz="1150" b="0" i="0">
+              <a:rPr sz="1050" b="0" i="0">
                 <a:solidFill>
                   <a:srgbClr val="B4C7D2"/>
                 </a:solidFill>
                 <a:latin typeface="Arial"/>
               </a:rPr>
-              <a:t>• J_rec delivered normal impulse</a:t>
-            </a:r>
-          </a:p>
-        </p:txBody>
-      </p:sp>
-      <p:sp>
-        <p:nvSpPr>
-          <p:cNvPr id="18" name="C3-E25 text 16" descr="sci-ppt:o016"/>
+              <a:t>0.5</a:t>
+            </a:r>
+          </a:p>
+        </p:txBody>
+      </p:sp>
+      <p:cxnSp>
+        <p:nvCxnSpPr>
+          <p:cNvPr id="24" name="C3-E25 line 22" descr="sci-ppt:o022"/>
+          <p:cNvCxnSpPr/>
+          <p:nvPr/>
+        </p:nvCxnSpPr>
+        <p:spPr>
+          <a:xfrm>
+            <a:off x="850392" y="1965960"/>
+            <a:ext cx="64008" cy="0"/>
+          </a:xfrm>
+          <a:prstGeom prst="line">
+            <a:avLst/>
+          </a:prstGeom>
+          <a:ln w="12700">
+            <a:solidFill>
+              <a:srgbClr val="B4C7D2"/>
+            </a:solidFill>
+          </a:ln>
+          <a:effectLst/>
+        </p:spPr>
+      </p:cxnSp>
+      <p:cxnSp>
+        <p:nvCxnSpPr>
+          <p:cNvPr id="25" name="C3-E25 line 23" descr="sci-ppt:o023"/>
+          <p:cNvCxnSpPr/>
+          <p:nvPr/>
+        </p:nvCxnSpPr>
+        <p:spPr>
+          <a:xfrm>
+            <a:off x="914400" y="1965960"/>
+            <a:ext cx="6400800" cy="0"/>
+          </a:xfrm>
+          <a:prstGeom prst="line">
+            <a:avLst/>
+          </a:prstGeom>
+          <a:ln w="7620">
+            <a:solidFill>
+              <a:srgbClr val="2E4756"/>
+            </a:solidFill>
+          </a:ln>
+          <a:effectLst/>
+        </p:spPr>
+      </p:cxnSp>
+      <p:sp>
+        <p:nvSpPr>
+          <p:cNvPr id="26" name="C3-E25 text 24" descr="sci-ppt:o024"/>
           <p:cNvSpPr txBox="1"/>
           <p:nvPr/>
         </p:nvSpPr>
         <p:spPr>
           <a:xfrm>
-            <a:off x="6217920" y="4329684"/>
-            <a:ext cx="5715000" cy="246888"/>
+            <a:off x="45720" y="1883664"/>
+            <a:ext cx="777240" cy="208407"/>
           </a:xfrm>
           <a:prstGeom prst="rect">
             <a:avLst/>
@@ -3684,38 +3768,38 @@
           <a:effectLst/>
         </p:spPr>
         <p:txBody>
-          <a:bodyPr wrap="square" lIns="27432" rIns="27432" tIns="18288" bIns="18288" anchor="ctr">
+          <a:bodyPr wrap="none" lIns="18288" rIns="18288" tIns="18288" bIns="18288" anchor="t">
             <a:spAutoFit/>
           </a:bodyPr>
           <a:lstStyle/>
           <a:p>
-            <a:pPr algn="l">
+            <a:pPr algn="r">
               <a:spcAft>
                 <a:spcPts val="0"/>
               </a:spcAft>
             </a:pPr>
             <a:r>
-              <a:rPr sz="1150" b="0" i="0">
+              <a:rPr sz="1050" b="0" i="0">
                 <a:solidFill>
                   <a:srgbClr val="B4C7D2"/>
                 </a:solidFill>
                 <a:latin typeface="Arial"/>
               </a:rPr>
-              <a:t>• A_j, a_j, L_j finite plug</a:t>
-            </a:r>
-          </a:p>
-        </p:txBody>
-      </p:sp>
-      <p:sp>
-        <p:nvSpPr>
-          <p:cNvPr id="19" name="C3-E25 text 17" descr="sci-ppt:o017"/>
+              <a:t>1.0</a:t>
+            </a:r>
+          </a:p>
+        </p:txBody>
+      </p:sp>
+      <p:sp>
+        <p:nvSpPr>
+          <p:cNvPr id="27" name="C3-E25 text 25" descr="sci-ppt:o025"/>
           <p:cNvSpPr txBox="1"/>
           <p:nvPr/>
         </p:nvSpPr>
         <p:spPr>
           <a:xfrm>
-            <a:off x="320040" y="4562856"/>
-            <a:ext cx="5715000" cy="246888"/>
+            <a:off x="914400" y="5221224"/>
+            <a:ext cx="6400800" cy="231648"/>
           </a:xfrm>
           <a:prstGeom prst="rect">
             <a:avLst/>
@@ -3724,38 +3808,38 @@
           <a:effectLst/>
         </p:spPr>
         <p:txBody>
-          <a:bodyPr wrap="square" lIns="27432" rIns="27432" tIns="18288" bIns="18288" anchor="ctr">
+          <a:bodyPr wrap="none" lIns="18288" rIns="18288" tIns="18288" bIns="18288" anchor="t">
             <a:spAutoFit/>
           </a:bodyPr>
           <a:lstStyle/>
           <a:p>
-            <a:pPr algn="l">
+            <a:pPr algn="ctr">
               <a:spcAft>
                 <a:spcPts val="0"/>
               </a:spcAft>
             </a:pPr>
             <a:r>
-              <a:rPr sz="1150" b="0" i="0">
+              <a:rPr sz="1200" b="0" i="0">
                 <a:solidFill>
-                  <a:srgbClr val="B4C7D2"/>
+                  <a:srgbClr val="E7F0F3"/>
                 </a:solidFill>
                 <a:latin typeface="Arial"/>
               </a:rPr>
-              <a:t>• ρcU_j fictitious rectangular pressure</a:t>
-            </a:r>
-          </a:p>
-        </p:txBody>
-      </p:sp>
-      <p:sp>
-        <p:nvSpPr>
-          <p:cNvPr id="20" name="C3-E25 text 18" descr="sci-ppt:o018"/>
+              <a:t>time from first contact  (ns)</a:t>
+            </a:r>
+          </a:p>
+        </p:txBody>
+      </p:sp>
+      <p:sp>
+        <p:nvSpPr>
+          <p:cNvPr id="28" name="C3-E25 text 26" descr="sci-ppt:o026"/>
           <p:cNvSpPr txBox="1"/>
           <p:nvPr/>
         </p:nvSpPr>
         <p:spPr>
           <a:xfrm>
-            <a:off x="6217920" y="4562856"/>
-            <a:ext cx="5715000" cy="246888"/>
+            <a:off x="365760" y="1024128"/>
+            <a:ext cx="6400800" cy="231648"/>
           </a:xfrm>
           <a:prstGeom prst="rect">
             <a:avLst/>
@@ -3764,7 +3848,7 @@
           <a:effectLst/>
         </p:spPr>
         <p:txBody>
-          <a:bodyPr wrap="square" lIns="27432" rIns="27432" tIns="18288" bIns="18288" anchor="ctr">
+          <a:bodyPr wrap="none" lIns="18288" rIns="18288" tIns="18288" bIns="18288" anchor="t">
             <a:spAutoFit/>
           </a:bodyPr>
           <a:lstStyle/>
@@ -3775,27 +3859,3771 @@
               </a:spcAft>
             </a:pPr>
             <a:r>
-              <a:rPr sz="1150" b="0" i="0">
+              <a:rPr sz="1200" b="0" i="0">
                 <a:solidFill>
-                  <a:srgbClr val="B4C7D2"/>
+                  <a:srgbClr val="E7F0F3"/>
                 </a:solidFill>
                 <a:latin typeface="Arial"/>
               </a:rPr>
-              <a:t>• τ_eq = L_j/c</a:t>
-            </a:r>
-          </a:p>
-        </p:txBody>
-      </p:sp>
-      <p:sp>
-        <p:nvSpPr>
-          <p:cNvPr id="21" name="C3-E25 text 19" descr="sci-ppt:o019"/>
+              <a:t>p / (ρ c Uⱼ)</a:t>
+            </a:r>
+          </a:p>
+        </p:txBody>
+      </p:sp>
+      <p:sp>
+        <p:nvSpPr>
+          <p:cNvPr id="29" name="C3-E25 polygon 27" descr="sci-ppt:o027"/>
+          <p:cNvSpPr/>
+          <p:nvPr/>
+        </p:nvSpPr>
+        <p:spPr>
+          <a:xfrm>
+            <a:off x="914400" y="1965960"/>
+            <a:ext cx="6400800" cy="2971800"/>
+          </a:xfrm>
+          <a:custGeom>
+            <a:avLst/>
+            <a:gdLst/>
+            <a:ahLst/>
+            <a:cxnLst/>
+            <a:rect l="l" t="t" r="r" b="b"/>
+            <a:pathLst>
+              <a:path w="6400800" h="2971800">
+                <a:moveTo>
+                  <a:pt x="0" y="0"/>
+                </a:moveTo>
+                <a:lnTo>
+                  <a:pt x="10685" y="0"/>
+                </a:lnTo>
+                <a:lnTo>
+                  <a:pt x="21371" y="0"/>
+                </a:lnTo>
+                <a:lnTo>
+                  <a:pt x="32057" y="0"/>
+                </a:lnTo>
+                <a:lnTo>
+                  <a:pt x="42743" y="0"/>
+                </a:lnTo>
+                <a:lnTo>
+                  <a:pt x="53429" y="0"/>
+                </a:lnTo>
+                <a:lnTo>
+                  <a:pt x="64114" y="0"/>
+                </a:lnTo>
+                <a:lnTo>
+                  <a:pt x="74800" y="0"/>
+                </a:lnTo>
+                <a:lnTo>
+                  <a:pt x="85486" y="0"/>
+                </a:lnTo>
+                <a:lnTo>
+                  <a:pt x="96172" y="0"/>
+                </a:lnTo>
+                <a:lnTo>
+                  <a:pt x="106858" y="0"/>
+                </a:lnTo>
+                <a:lnTo>
+                  <a:pt x="117543" y="0"/>
+                </a:lnTo>
+                <a:lnTo>
+                  <a:pt x="128229" y="0"/>
+                </a:lnTo>
+                <a:lnTo>
+                  <a:pt x="138915" y="0"/>
+                </a:lnTo>
+                <a:lnTo>
+                  <a:pt x="149601" y="0"/>
+                </a:lnTo>
+                <a:lnTo>
+                  <a:pt x="160287" y="0"/>
+                </a:lnTo>
+                <a:lnTo>
+                  <a:pt x="170972" y="0"/>
+                </a:lnTo>
+                <a:lnTo>
+                  <a:pt x="181658" y="0"/>
+                </a:lnTo>
+                <a:lnTo>
+                  <a:pt x="192344" y="0"/>
+                </a:lnTo>
+                <a:lnTo>
+                  <a:pt x="203030" y="0"/>
+                </a:lnTo>
+                <a:lnTo>
+                  <a:pt x="213716" y="0"/>
+                </a:lnTo>
+                <a:lnTo>
+                  <a:pt x="224402" y="0"/>
+                </a:lnTo>
+                <a:lnTo>
+                  <a:pt x="235087" y="0"/>
+                </a:lnTo>
+                <a:lnTo>
+                  <a:pt x="245773" y="0"/>
+                </a:lnTo>
+                <a:lnTo>
+                  <a:pt x="256459" y="0"/>
+                </a:lnTo>
+                <a:lnTo>
+                  <a:pt x="267145" y="0"/>
+                </a:lnTo>
+                <a:lnTo>
+                  <a:pt x="277831" y="0"/>
+                </a:lnTo>
+                <a:lnTo>
+                  <a:pt x="288516" y="0"/>
+                </a:lnTo>
+                <a:lnTo>
+                  <a:pt x="299202" y="0"/>
+                </a:lnTo>
+                <a:lnTo>
+                  <a:pt x="309888" y="0"/>
+                </a:lnTo>
+                <a:lnTo>
+                  <a:pt x="320574" y="0"/>
+                </a:lnTo>
+                <a:lnTo>
+                  <a:pt x="331260" y="0"/>
+                </a:lnTo>
+                <a:lnTo>
+                  <a:pt x="341945" y="0"/>
+                </a:lnTo>
+                <a:lnTo>
+                  <a:pt x="352631" y="0"/>
+                </a:lnTo>
+                <a:lnTo>
+                  <a:pt x="363317" y="0"/>
+                </a:lnTo>
+                <a:lnTo>
+                  <a:pt x="374003" y="0"/>
+                </a:lnTo>
+                <a:lnTo>
+                  <a:pt x="384689" y="0"/>
+                </a:lnTo>
+                <a:lnTo>
+                  <a:pt x="395374" y="0"/>
+                </a:lnTo>
+                <a:lnTo>
+                  <a:pt x="406060" y="0"/>
+                </a:lnTo>
+                <a:lnTo>
+                  <a:pt x="416746" y="0"/>
+                </a:lnTo>
+                <a:lnTo>
+                  <a:pt x="427432" y="0"/>
+                </a:lnTo>
+                <a:lnTo>
+                  <a:pt x="438118" y="0"/>
+                </a:lnTo>
+                <a:lnTo>
+                  <a:pt x="448804" y="0"/>
+                </a:lnTo>
+                <a:lnTo>
+                  <a:pt x="459489" y="0"/>
+                </a:lnTo>
+                <a:lnTo>
+                  <a:pt x="470175" y="0"/>
+                </a:lnTo>
+                <a:lnTo>
+                  <a:pt x="480861" y="0"/>
+                </a:lnTo>
+                <a:lnTo>
+                  <a:pt x="491547" y="0"/>
+                </a:lnTo>
+                <a:lnTo>
+                  <a:pt x="502233" y="0"/>
+                </a:lnTo>
+                <a:lnTo>
+                  <a:pt x="512918" y="0"/>
+                </a:lnTo>
+                <a:lnTo>
+                  <a:pt x="523604" y="0"/>
+                </a:lnTo>
+                <a:lnTo>
+                  <a:pt x="534290" y="0"/>
+                </a:lnTo>
+                <a:lnTo>
+                  <a:pt x="544976" y="0"/>
+                </a:lnTo>
+                <a:lnTo>
+                  <a:pt x="555662" y="0"/>
+                </a:lnTo>
+                <a:lnTo>
+                  <a:pt x="566347" y="0"/>
+                </a:lnTo>
+                <a:lnTo>
+                  <a:pt x="577033" y="0"/>
+                </a:lnTo>
+                <a:lnTo>
+                  <a:pt x="587719" y="0"/>
+                </a:lnTo>
+                <a:lnTo>
+                  <a:pt x="598405" y="0"/>
+                </a:lnTo>
+                <a:lnTo>
+                  <a:pt x="609091" y="0"/>
+                </a:lnTo>
+                <a:lnTo>
+                  <a:pt x="619776" y="0"/>
+                </a:lnTo>
+                <a:lnTo>
+                  <a:pt x="630462" y="0"/>
+                </a:lnTo>
+                <a:lnTo>
+                  <a:pt x="641148" y="0"/>
+                </a:lnTo>
+                <a:lnTo>
+                  <a:pt x="651834" y="0"/>
+                </a:lnTo>
+                <a:lnTo>
+                  <a:pt x="662520" y="0"/>
+                </a:lnTo>
+                <a:lnTo>
+                  <a:pt x="673206" y="0"/>
+                </a:lnTo>
+                <a:lnTo>
+                  <a:pt x="683891" y="0"/>
+                </a:lnTo>
+                <a:lnTo>
+                  <a:pt x="694577" y="0"/>
+                </a:lnTo>
+                <a:lnTo>
+                  <a:pt x="705263" y="0"/>
+                </a:lnTo>
+                <a:lnTo>
+                  <a:pt x="715949" y="0"/>
+                </a:lnTo>
+                <a:lnTo>
+                  <a:pt x="726635" y="0"/>
+                </a:lnTo>
+                <a:lnTo>
+                  <a:pt x="737320" y="0"/>
+                </a:lnTo>
+                <a:lnTo>
+                  <a:pt x="748006" y="0"/>
+                </a:lnTo>
+                <a:lnTo>
+                  <a:pt x="758692" y="0"/>
+                </a:lnTo>
+                <a:lnTo>
+                  <a:pt x="769378" y="0"/>
+                </a:lnTo>
+                <a:lnTo>
+                  <a:pt x="780064" y="0"/>
+                </a:lnTo>
+                <a:lnTo>
+                  <a:pt x="790749" y="0"/>
+                </a:lnTo>
+                <a:lnTo>
+                  <a:pt x="801435" y="0"/>
+                </a:lnTo>
+                <a:lnTo>
+                  <a:pt x="812121" y="0"/>
+                </a:lnTo>
+                <a:lnTo>
+                  <a:pt x="822807" y="0"/>
+                </a:lnTo>
+                <a:lnTo>
+                  <a:pt x="833493" y="0"/>
+                </a:lnTo>
+                <a:lnTo>
+                  <a:pt x="844178" y="0"/>
+                </a:lnTo>
+                <a:lnTo>
+                  <a:pt x="854864" y="0"/>
+                </a:lnTo>
+                <a:lnTo>
+                  <a:pt x="865550" y="0"/>
+                </a:lnTo>
+                <a:lnTo>
+                  <a:pt x="876236" y="0"/>
+                </a:lnTo>
+                <a:lnTo>
+                  <a:pt x="886922" y="0"/>
+                </a:lnTo>
+                <a:lnTo>
+                  <a:pt x="897608" y="0"/>
+                </a:lnTo>
+                <a:lnTo>
+                  <a:pt x="908293" y="0"/>
+                </a:lnTo>
+                <a:lnTo>
+                  <a:pt x="918979" y="0"/>
+                </a:lnTo>
+                <a:lnTo>
+                  <a:pt x="929665" y="0"/>
+                </a:lnTo>
+                <a:lnTo>
+                  <a:pt x="940351" y="0"/>
+                </a:lnTo>
+                <a:lnTo>
+                  <a:pt x="951037" y="0"/>
+                </a:lnTo>
+                <a:lnTo>
+                  <a:pt x="961722" y="0"/>
+                </a:lnTo>
+                <a:lnTo>
+                  <a:pt x="972408" y="0"/>
+                </a:lnTo>
+                <a:lnTo>
+                  <a:pt x="983094" y="0"/>
+                </a:lnTo>
+                <a:lnTo>
+                  <a:pt x="993780" y="0"/>
+                </a:lnTo>
+                <a:lnTo>
+                  <a:pt x="1004466" y="0"/>
+                </a:lnTo>
+                <a:lnTo>
+                  <a:pt x="1015151" y="0"/>
+                </a:lnTo>
+                <a:lnTo>
+                  <a:pt x="1025837" y="0"/>
+                </a:lnTo>
+                <a:lnTo>
+                  <a:pt x="1036523" y="0"/>
+                </a:lnTo>
+                <a:lnTo>
+                  <a:pt x="1047209" y="0"/>
+                </a:lnTo>
+                <a:lnTo>
+                  <a:pt x="1057895" y="0"/>
+                </a:lnTo>
+                <a:lnTo>
+                  <a:pt x="1068580" y="0"/>
+                </a:lnTo>
+                <a:lnTo>
+                  <a:pt x="1079266" y="0"/>
+                </a:lnTo>
+                <a:lnTo>
+                  <a:pt x="1089952" y="0"/>
+                </a:lnTo>
+                <a:lnTo>
+                  <a:pt x="1100638" y="0"/>
+                </a:lnTo>
+                <a:lnTo>
+                  <a:pt x="1111324" y="0"/>
+                </a:lnTo>
+                <a:lnTo>
+                  <a:pt x="1122010" y="0"/>
+                </a:lnTo>
+                <a:lnTo>
+                  <a:pt x="1132695" y="0"/>
+                </a:lnTo>
+                <a:lnTo>
+                  <a:pt x="1143381" y="0"/>
+                </a:lnTo>
+                <a:lnTo>
+                  <a:pt x="1154067" y="0"/>
+                </a:lnTo>
+                <a:lnTo>
+                  <a:pt x="1164753" y="0"/>
+                </a:lnTo>
+                <a:lnTo>
+                  <a:pt x="1175439" y="0"/>
+                </a:lnTo>
+                <a:lnTo>
+                  <a:pt x="1186124" y="0"/>
+                </a:lnTo>
+                <a:lnTo>
+                  <a:pt x="1196810" y="0"/>
+                </a:lnTo>
+                <a:lnTo>
+                  <a:pt x="1207496" y="0"/>
+                </a:lnTo>
+                <a:lnTo>
+                  <a:pt x="1218182" y="0"/>
+                </a:lnTo>
+                <a:lnTo>
+                  <a:pt x="1228868" y="0"/>
+                </a:lnTo>
+                <a:lnTo>
+                  <a:pt x="1239553" y="0"/>
+                </a:lnTo>
+                <a:lnTo>
+                  <a:pt x="1250239" y="0"/>
+                </a:lnTo>
+                <a:lnTo>
+                  <a:pt x="1260925" y="0"/>
+                </a:lnTo>
+                <a:lnTo>
+                  <a:pt x="1271611" y="0"/>
+                </a:lnTo>
+                <a:lnTo>
+                  <a:pt x="1282297" y="0"/>
+                </a:lnTo>
+                <a:lnTo>
+                  <a:pt x="1292982" y="0"/>
+                </a:lnTo>
+                <a:lnTo>
+                  <a:pt x="1303668" y="0"/>
+                </a:lnTo>
+                <a:lnTo>
+                  <a:pt x="1314354" y="0"/>
+                </a:lnTo>
+                <a:lnTo>
+                  <a:pt x="1325040" y="0"/>
+                </a:lnTo>
+                <a:lnTo>
+                  <a:pt x="1335726" y="0"/>
+                </a:lnTo>
+                <a:lnTo>
+                  <a:pt x="1346412" y="0"/>
+                </a:lnTo>
+                <a:lnTo>
+                  <a:pt x="1357097" y="0"/>
+                </a:lnTo>
+                <a:lnTo>
+                  <a:pt x="1367783" y="0"/>
+                </a:lnTo>
+                <a:lnTo>
+                  <a:pt x="1378469" y="0"/>
+                </a:lnTo>
+                <a:lnTo>
+                  <a:pt x="1389155" y="0"/>
+                </a:lnTo>
+                <a:lnTo>
+                  <a:pt x="1399841" y="0"/>
+                </a:lnTo>
+                <a:lnTo>
+                  <a:pt x="1410526" y="0"/>
+                </a:lnTo>
+                <a:lnTo>
+                  <a:pt x="1421212" y="0"/>
+                </a:lnTo>
+                <a:lnTo>
+                  <a:pt x="1431898" y="0"/>
+                </a:lnTo>
+                <a:lnTo>
+                  <a:pt x="1442584" y="0"/>
+                </a:lnTo>
+                <a:lnTo>
+                  <a:pt x="1453270" y="0"/>
+                </a:lnTo>
+                <a:lnTo>
+                  <a:pt x="1463955" y="0"/>
+                </a:lnTo>
+                <a:lnTo>
+                  <a:pt x="1474641" y="0"/>
+                </a:lnTo>
+                <a:lnTo>
+                  <a:pt x="1485327" y="0"/>
+                </a:lnTo>
+                <a:lnTo>
+                  <a:pt x="1496013" y="0"/>
+                </a:lnTo>
+                <a:lnTo>
+                  <a:pt x="1506699" y="0"/>
+                </a:lnTo>
+                <a:lnTo>
+                  <a:pt x="1517384" y="0"/>
+                </a:lnTo>
+                <a:lnTo>
+                  <a:pt x="1528070" y="0"/>
+                </a:lnTo>
+                <a:lnTo>
+                  <a:pt x="1538756" y="0"/>
+                </a:lnTo>
+                <a:lnTo>
+                  <a:pt x="1549442" y="0"/>
+                </a:lnTo>
+                <a:lnTo>
+                  <a:pt x="1560128" y="0"/>
+                </a:lnTo>
+                <a:lnTo>
+                  <a:pt x="1570814" y="0"/>
+                </a:lnTo>
+                <a:lnTo>
+                  <a:pt x="1581499" y="0"/>
+                </a:lnTo>
+                <a:lnTo>
+                  <a:pt x="1592185" y="0"/>
+                </a:lnTo>
+                <a:lnTo>
+                  <a:pt x="1602871" y="0"/>
+                </a:lnTo>
+                <a:lnTo>
+                  <a:pt x="1613557" y="0"/>
+                </a:lnTo>
+                <a:lnTo>
+                  <a:pt x="1624243" y="0"/>
+                </a:lnTo>
+                <a:lnTo>
+                  <a:pt x="1634928" y="0"/>
+                </a:lnTo>
+                <a:lnTo>
+                  <a:pt x="1645614" y="0"/>
+                </a:lnTo>
+                <a:lnTo>
+                  <a:pt x="1656300" y="0"/>
+                </a:lnTo>
+                <a:lnTo>
+                  <a:pt x="1666986" y="0"/>
+                </a:lnTo>
+                <a:lnTo>
+                  <a:pt x="1677672" y="0"/>
+                </a:lnTo>
+                <a:lnTo>
+                  <a:pt x="1688357" y="0"/>
+                </a:lnTo>
+                <a:lnTo>
+                  <a:pt x="1699043" y="0"/>
+                </a:lnTo>
+                <a:lnTo>
+                  <a:pt x="1709729" y="0"/>
+                </a:lnTo>
+                <a:lnTo>
+                  <a:pt x="1720415" y="0"/>
+                </a:lnTo>
+                <a:lnTo>
+                  <a:pt x="1731101" y="0"/>
+                </a:lnTo>
+                <a:lnTo>
+                  <a:pt x="1741786" y="0"/>
+                </a:lnTo>
+                <a:lnTo>
+                  <a:pt x="1752472" y="0"/>
+                </a:lnTo>
+                <a:lnTo>
+                  <a:pt x="1763158" y="0"/>
+                </a:lnTo>
+                <a:lnTo>
+                  <a:pt x="1773844" y="0"/>
+                </a:lnTo>
+                <a:lnTo>
+                  <a:pt x="1784530" y="0"/>
+                </a:lnTo>
+                <a:lnTo>
+                  <a:pt x="1795216" y="0"/>
+                </a:lnTo>
+                <a:lnTo>
+                  <a:pt x="1805901" y="0"/>
+                </a:lnTo>
+                <a:lnTo>
+                  <a:pt x="1816587" y="0"/>
+                </a:lnTo>
+                <a:lnTo>
+                  <a:pt x="1827273" y="0"/>
+                </a:lnTo>
+                <a:lnTo>
+                  <a:pt x="1837959" y="0"/>
+                </a:lnTo>
+                <a:lnTo>
+                  <a:pt x="1848645" y="0"/>
+                </a:lnTo>
+                <a:lnTo>
+                  <a:pt x="1859330" y="0"/>
+                </a:lnTo>
+                <a:lnTo>
+                  <a:pt x="1870016" y="0"/>
+                </a:lnTo>
+                <a:lnTo>
+                  <a:pt x="1880702" y="0"/>
+                </a:lnTo>
+                <a:lnTo>
+                  <a:pt x="1891388" y="0"/>
+                </a:lnTo>
+                <a:lnTo>
+                  <a:pt x="1902074" y="0"/>
+                </a:lnTo>
+                <a:lnTo>
+                  <a:pt x="1912759" y="0"/>
+                </a:lnTo>
+                <a:lnTo>
+                  <a:pt x="1923445" y="0"/>
+                </a:lnTo>
+                <a:lnTo>
+                  <a:pt x="1934131" y="0"/>
+                </a:lnTo>
+                <a:lnTo>
+                  <a:pt x="1944817" y="0"/>
+                </a:lnTo>
+                <a:lnTo>
+                  <a:pt x="1955503" y="0"/>
+                </a:lnTo>
+                <a:lnTo>
+                  <a:pt x="1966188" y="0"/>
+                </a:lnTo>
+                <a:lnTo>
+                  <a:pt x="1976874" y="0"/>
+                </a:lnTo>
+                <a:lnTo>
+                  <a:pt x="1987560" y="0"/>
+                </a:lnTo>
+                <a:lnTo>
+                  <a:pt x="1998246" y="0"/>
+                </a:lnTo>
+                <a:lnTo>
+                  <a:pt x="2008932" y="0"/>
+                </a:lnTo>
+                <a:lnTo>
+                  <a:pt x="2019618" y="0"/>
+                </a:lnTo>
+                <a:lnTo>
+                  <a:pt x="2030303" y="0"/>
+                </a:lnTo>
+                <a:lnTo>
+                  <a:pt x="2040989" y="0"/>
+                </a:lnTo>
+                <a:lnTo>
+                  <a:pt x="2051675" y="0"/>
+                </a:lnTo>
+                <a:lnTo>
+                  <a:pt x="2062361" y="0"/>
+                </a:lnTo>
+                <a:lnTo>
+                  <a:pt x="2073047" y="0"/>
+                </a:lnTo>
+                <a:lnTo>
+                  <a:pt x="2083732" y="0"/>
+                </a:lnTo>
+                <a:lnTo>
+                  <a:pt x="2094418" y="0"/>
+                </a:lnTo>
+                <a:lnTo>
+                  <a:pt x="2105104" y="0"/>
+                </a:lnTo>
+                <a:lnTo>
+                  <a:pt x="2115790" y="0"/>
+                </a:lnTo>
+                <a:lnTo>
+                  <a:pt x="2126476" y="0"/>
+                </a:lnTo>
+                <a:lnTo>
+                  <a:pt x="2137161" y="0"/>
+                </a:lnTo>
+                <a:lnTo>
+                  <a:pt x="2147847" y="0"/>
+                </a:lnTo>
+                <a:lnTo>
+                  <a:pt x="2158533" y="0"/>
+                </a:lnTo>
+                <a:lnTo>
+                  <a:pt x="2169219" y="0"/>
+                </a:lnTo>
+                <a:lnTo>
+                  <a:pt x="2179905" y="0"/>
+                </a:lnTo>
+                <a:lnTo>
+                  <a:pt x="2190590" y="0"/>
+                </a:lnTo>
+                <a:lnTo>
+                  <a:pt x="2201276" y="0"/>
+                </a:lnTo>
+                <a:lnTo>
+                  <a:pt x="2211962" y="0"/>
+                </a:lnTo>
+                <a:lnTo>
+                  <a:pt x="2222648" y="0"/>
+                </a:lnTo>
+                <a:lnTo>
+                  <a:pt x="2233334" y="0"/>
+                </a:lnTo>
+                <a:lnTo>
+                  <a:pt x="2244020" y="0"/>
+                </a:lnTo>
+                <a:lnTo>
+                  <a:pt x="2254705" y="0"/>
+                </a:lnTo>
+                <a:lnTo>
+                  <a:pt x="2265391" y="0"/>
+                </a:lnTo>
+                <a:lnTo>
+                  <a:pt x="2276077" y="0"/>
+                </a:lnTo>
+                <a:lnTo>
+                  <a:pt x="2286763" y="0"/>
+                </a:lnTo>
+                <a:lnTo>
+                  <a:pt x="2297449" y="0"/>
+                </a:lnTo>
+                <a:lnTo>
+                  <a:pt x="2308134" y="0"/>
+                </a:lnTo>
+                <a:lnTo>
+                  <a:pt x="2318820" y="0"/>
+                </a:lnTo>
+                <a:lnTo>
+                  <a:pt x="2329506" y="0"/>
+                </a:lnTo>
+                <a:lnTo>
+                  <a:pt x="2340192" y="0"/>
+                </a:lnTo>
+                <a:lnTo>
+                  <a:pt x="2350878" y="0"/>
+                </a:lnTo>
+                <a:lnTo>
+                  <a:pt x="2361563" y="0"/>
+                </a:lnTo>
+                <a:lnTo>
+                  <a:pt x="2372249" y="0"/>
+                </a:lnTo>
+                <a:lnTo>
+                  <a:pt x="2382935" y="0"/>
+                </a:lnTo>
+                <a:lnTo>
+                  <a:pt x="2393621" y="0"/>
+                </a:lnTo>
+                <a:lnTo>
+                  <a:pt x="2404307" y="0"/>
+                </a:lnTo>
+                <a:lnTo>
+                  <a:pt x="2414992" y="0"/>
+                </a:lnTo>
+                <a:lnTo>
+                  <a:pt x="2425678" y="0"/>
+                </a:lnTo>
+                <a:lnTo>
+                  <a:pt x="2436364" y="0"/>
+                </a:lnTo>
+                <a:lnTo>
+                  <a:pt x="2447050" y="0"/>
+                </a:lnTo>
+                <a:lnTo>
+                  <a:pt x="2457736" y="0"/>
+                </a:lnTo>
+                <a:lnTo>
+                  <a:pt x="2468422" y="0"/>
+                </a:lnTo>
+                <a:lnTo>
+                  <a:pt x="2479107" y="0"/>
+                </a:lnTo>
+                <a:lnTo>
+                  <a:pt x="2489793" y="0"/>
+                </a:lnTo>
+                <a:lnTo>
+                  <a:pt x="2500479" y="0"/>
+                </a:lnTo>
+                <a:lnTo>
+                  <a:pt x="2511165" y="0"/>
+                </a:lnTo>
+                <a:lnTo>
+                  <a:pt x="2521851" y="0"/>
+                </a:lnTo>
+                <a:lnTo>
+                  <a:pt x="2532536" y="0"/>
+                </a:lnTo>
+                <a:lnTo>
+                  <a:pt x="2543222" y="0"/>
+                </a:lnTo>
+                <a:lnTo>
+                  <a:pt x="2553908" y="0"/>
+                </a:lnTo>
+                <a:lnTo>
+                  <a:pt x="2564594" y="0"/>
+                </a:lnTo>
+                <a:lnTo>
+                  <a:pt x="2575280" y="0"/>
+                </a:lnTo>
+                <a:lnTo>
+                  <a:pt x="2585965" y="0"/>
+                </a:lnTo>
+                <a:lnTo>
+                  <a:pt x="2596651" y="0"/>
+                </a:lnTo>
+                <a:lnTo>
+                  <a:pt x="2607337" y="0"/>
+                </a:lnTo>
+                <a:lnTo>
+                  <a:pt x="2618023" y="0"/>
+                </a:lnTo>
+                <a:lnTo>
+                  <a:pt x="2628709" y="0"/>
+                </a:lnTo>
+                <a:lnTo>
+                  <a:pt x="2639394" y="0"/>
+                </a:lnTo>
+                <a:lnTo>
+                  <a:pt x="2650080" y="0"/>
+                </a:lnTo>
+                <a:lnTo>
+                  <a:pt x="2660766" y="0"/>
+                </a:lnTo>
+                <a:lnTo>
+                  <a:pt x="2671452" y="0"/>
+                </a:lnTo>
+                <a:lnTo>
+                  <a:pt x="2682138" y="0"/>
+                </a:lnTo>
+                <a:lnTo>
+                  <a:pt x="2692824" y="0"/>
+                </a:lnTo>
+                <a:lnTo>
+                  <a:pt x="2703509" y="0"/>
+                </a:lnTo>
+                <a:lnTo>
+                  <a:pt x="2714195" y="0"/>
+                </a:lnTo>
+                <a:lnTo>
+                  <a:pt x="2724881" y="0"/>
+                </a:lnTo>
+                <a:lnTo>
+                  <a:pt x="2735567" y="0"/>
+                </a:lnTo>
+                <a:lnTo>
+                  <a:pt x="2746253" y="0"/>
+                </a:lnTo>
+                <a:lnTo>
+                  <a:pt x="2756938" y="0"/>
+                </a:lnTo>
+                <a:lnTo>
+                  <a:pt x="2767624" y="0"/>
+                </a:lnTo>
+                <a:lnTo>
+                  <a:pt x="2778310" y="0"/>
+                </a:lnTo>
+                <a:lnTo>
+                  <a:pt x="2788996" y="0"/>
+                </a:lnTo>
+                <a:lnTo>
+                  <a:pt x="2799682" y="0"/>
+                </a:lnTo>
+                <a:lnTo>
+                  <a:pt x="2810367" y="0"/>
+                </a:lnTo>
+                <a:lnTo>
+                  <a:pt x="2821053" y="0"/>
+                </a:lnTo>
+                <a:lnTo>
+                  <a:pt x="2831739" y="0"/>
+                </a:lnTo>
+                <a:lnTo>
+                  <a:pt x="2842425" y="0"/>
+                </a:lnTo>
+                <a:lnTo>
+                  <a:pt x="2853111" y="0"/>
+                </a:lnTo>
+                <a:lnTo>
+                  <a:pt x="2863796" y="0"/>
+                </a:lnTo>
+                <a:lnTo>
+                  <a:pt x="2874482" y="0"/>
+                </a:lnTo>
+                <a:lnTo>
+                  <a:pt x="2885168" y="0"/>
+                </a:lnTo>
+                <a:lnTo>
+                  <a:pt x="2895854" y="0"/>
+                </a:lnTo>
+                <a:lnTo>
+                  <a:pt x="2906540" y="0"/>
+                </a:lnTo>
+                <a:lnTo>
+                  <a:pt x="2917226" y="0"/>
+                </a:lnTo>
+                <a:lnTo>
+                  <a:pt x="2927911" y="0"/>
+                </a:lnTo>
+                <a:lnTo>
+                  <a:pt x="2938597" y="0"/>
+                </a:lnTo>
+                <a:lnTo>
+                  <a:pt x="2949283" y="0"/>
+                </a:lnTo>
+                <a:lnTo>
+                  <a:pt x="2959969" y="0"/>
+                </a:lnTo>
+                <a:lnTo>
+                  <a:pt x="2970655" y="0"/>
+                </a:lnTo>
+                <a:lnTo>
+                  <a:pt x="2981340" y="0"/>
+                </a:lnTo>
+                <a:lnTo>
+                  <a:pt x="2992026" y="0"/>
+                </a:lnTo>
+                <a:lnTo>
+                  <a:pt x="3002712" y="0"/>
+                </a:lnTo>
+                <a:lnTo>
+                  <a:pt x="3013398" y="0"/>
+                </a:lnTo>
+                <a:lnTo>
+                  <a:pt x="3024084" y="0"/>
+                </a:lnTo>
+                <a:lnTo>
+                  <a:pt x="3034769" y="0"/>
+                </a:lnTo>
+                <a:lnTo>
+                  <a:pt x="3045455" y="0"/>
+                </a:lnTo>
+                <a:lnTo>
+                  <a:pt x="3056141" y="0"/>
+                </a:lnTo>
+                <a:lnTo>
+                  <a:pt x="3066827" y="0"/>
+                </a:lnTo>
+                <a:lnTo>
+                  <a:pt x="3077513" y="0"/>
+                </a:lnTo>
+                <a:lnTo>
+                  <a:pt x="3088198" y="0"/>
+                </a:lnTo>
+                <a:lnTo>
+                  <a:pt x="3098884" y="0"/>
+                </a:lnTo>
+                <a:lnTo>
+                  <a:pt x="3109570" y="0"/>
+                </a:lnTo>
+                <a:lnTo>
+                  <a:pt x="3120256" y="0"/>
+                </a:lnTo>
+                <a:lnTo>
+                  <a:pt x="3130942" y="0"/>
+                </a:lnTo>
+                <a:lnTo>
+                  <a:pt x="3141628" y="0"/>
+                </a:lnTo>
+                <a:lnTo>
+                  <a:pt x="3152313" y="0"/>
+                </a:lnTo>
+                <a:lnTo>
+                  <a:pt x="3162999" y="0"/>
+                </a:lnTo>
+                <a:lnTo>
+                  <a:pt x="3173685" y="0"/>
+                </a:lnTo>
+                <a:lnTo>
+                  <a:pt x="3184371" y="0"/>
+                </a:lnTo>
+                <a:lnTo>
+                  <a:pt x="3195057" y="0"/>
+                </a:lnTo>
+                <a:lnTo>
+                  <a:pt x="3205742" y="0"/>
+                </a:lnTo>
+                <a:lnTo>
+                  <a:pt x="3216428" y="0"/>
+                </a:lnTo>
+                <a:lnTo>
+                  <a:pt x="3227114" y="0"/>
+                </a:lnTo>
+                <a:lnTo>
+                  <a:pt x="3237800" y="0"/>
+                </a:lnTo>
+                <a:lnTo>
+                  <a:pt x="3248486" y="0"/>
+                </a:lnTo>
+                <a:lnTo>
+                  <a:pt x="3259171" y="0"/>
+                </a:lnTo>
+                <a:lnTo>
+                  <a:pt x="3269857" y="0"/>
+                </a:lnTo>
+                <a:lnTo>
+                  <a:pt x="3280543" y="0"/>
+                </a:lnTo>
+                <a:lnTo>
+                  <a:pt x="3291229" y="0"/>
+                </a:lnTo>
+                <a:lnTo>
+                  <a:pt x="3301915" y="0"/>
+                </a:lnTo>
+                <a:lnTo>
+                  <a:pt x="3312601" y="0"/>
+                </a:lnTo>
+                <a:lnTo>
+                  <a:pt x="3323286" y="0"/>
+                </a:lnTo>
+                <a:lnTo>
+                  <a:pt x="3333972" y="0"/>
+                </a:lnTo>
+                <a:lnTo>
+                  <a:pt x="3344658" y="0"/>
+                </a:lnTo>
+                <a:lnTo>
+                  <a:pt x="3355344" y="0"/>
+                </a:lnTo>
+                <a:lnTo>
+                  <a:pt x="3366030" y="0"/>
+                </a:lnTo>
+                <a:lnTo>
+                  <a:pt x="3376715" y="0"/>
+                </a:lnTo>
+                <a:lnTo>
+                  <a:pt x="3387401" y="0"/>
+                </a:lnTo>
+                <a:lnTo>
+                  <a:pt x="3398087" y="0"/>
+                </a:lnTo>
+                <a:lnTo>
+                  <a:pt x="3408773" y="0"/>
+                </a:lnTo>
+                <a:lnTo>
+                  <a:pt x="3419459" y="0"/>
+                </a:lnTo>
+                <a:lnTo>
+                  <a:pt x="3430144" y="0"/>
+                </a:lnTo>
+                <a:lnTo>
+                  <a:pt x="3440830" y="0"/>
+                </a:lnTo>
+                <a:lnTo>
+                  <a:pt x="3451516" y="0"/>
+                </a:lnTo>
+                <a:lnTo>
+                  <a:pt x="3462202" y="0"/>
+                </a:lnTo>
+                <a:lnTo>
+                  <a:pt x="3472888" y="0"/>
+                </a:lnTo>
+                <a:lnTo>
+                  <a:pt x="3483573" y="0"/>
+                </a:lnTo>
+                <a:lnTo>
+                  <a:pt x="3494259" y="0"/>
+                </a:lnTo>
+                <a:lnTo>
+                  <a:pt x="3504945" y="0"/>
+                </a:lnTo>
+                <a:lnTo>
+                  <a:pt x="3515631" y="0"/>
+                </a:lnTo>
+                <a:lnTo>
+                  <a:pt x="3526317" y="0"/>
+                </a:lnTo>
+                <a:lnTo>
+                  <a:pt x="3537003" y="0"/>
+                </a:lnTo>
+                <a:lnTo>
+                  <a:pt x="3547688" y="0"/>
+                </a:lnTo>
+                <a:lnTo>
+                  <a:pt x="3558374" y="0"/>
+                </a:lnTo>
+                <a:lnTo>
+                  <a:pt x="3569060" y="0"/>
+                </a:lnTo>
+                <a:lnTo>
+                  <a:pt x="3579746" y="0"/>
+                </a:lnTo>
+                <a:lnTo>
+                  <a:pt x="3590432" y="0"/>
+                </a:lnTo>
+                <a:lnTo>
+                  <a:pt x="3601117" y="0"/>
+                </a:lnTo>
+                <a:lnTo>
+                  <a:pt x="3611803" y="0"/>
+                </a:lnTo>
+                <a:lnTo>
+                  <a:pt x="3622489" y="0"/>
+                </a:lnTo>
+                <a:lnTo>
+                  <a:pt x="3633175" y="0"/>
+                </a:lnTo>
+                <a:lnTo>
+                  <a:pt x="3643861" y="0"/>
+                </a:lnTo>
+                <a:lnTo>
+                  <a:pt x="3654546" y="0"/>
+                </a:lnTo>
+                <a:lnTo>
+                  <a:pt x="3665232" y="0"/>
+                </a:lnTo>
+                <a:lnTo>
+                  <a:pt x="3675918" y="0"/>
+                </a:lnTo>
+                <a:lnTo>
+                  <a:pt x="3686604" y="0"/>
+                </a:lnTo>
+                <a:lnTo>
+                  <a:pt x="3697290" y="0"/>
+                </a:lnTo>
+                <a:lnTo>
+                  <a:pt x="3707975" y="0"/>
+                </a:lnTo>
+                <a:lnTo>
+                  <a:pt x="3718661" y="0"/>
+                </a:lnTo>
+                <a:lnTo>
+                  <a:pt x="3729347" y="0"/>
+                </a:lnTo>
+                <a:lnTo>
+                  <a:pt x="3740033" y="0"/>
+                </a:lnTo>
+                <a:lnTo>
+                  <a:pt x="3750719" y="0"/>
+                </a:lnTo>
+                <a:lnTo>
+                  <a:pt x="3761405" y="0"/>
+                </a:lnTo>
+                <a:lnTo>
+                  <a:pt x="3772090" y="0"/>
+                </a:lnTo>
+                <a:lnTo>
+                  <a:pt x="3782776" y="0"/>
+                </a:lnTo>
+                <a:lnTo>
+                  <a:pt x="3793462" y="0"/>
+                </a:lnTo>
+                <a:lnTo>
+                  <a:pt x="3804148" y="0"/>
+                </a:lnTo>
+                <a:lnTo>
+                  <a:pt x="3814834" y="0"/>
+                </a:lnTo>
+                <a:lnTo>
+                  <a:pt x="3825519" y="0"/>
+                </a:lnTo>
+                <a:lnTo>
+                  <a:pt x="3836205" y="0"/>
+                </a:lnTo>
+                <a:lnTo>
+                  <a:pt x="3846891" y="0"/>
+                </a:lnTo>
+                <a:lnTo>
+                  <a:pt x="3857577" y="0"/>
+                </a:lnTo>
+                <a:lnTo>
+                  <a:pt x="3868263" y="0"/>
+                </a:lnTo>
+                <a:lnTo>
+                  <a:pt x="3878948" y="0"/>
+                </a:lnTo>
+                <a:lnTo>
+                  <a:pt x="3889634" y="0"/>
+                </a:lnTo>
+                <a:lnTo>
+                  <a:pt x="3900320" y="0"/>
+                </a:lnTo>
+                <a:lnTo>
+                  <a:pt x="3911006" y="0"/>
+                </a:lnTo>
+                <a:lnTo>
+                  <a:pt x="3921692" y="0"/>
+                </a:lnTo>
+                <a:lnTo>
+                  <a:pt x="3932377" y="0"/>
+                </a:lnTo>
+                <a:lnTo>
+                  <a:pt x="3943063" y="0"/>
+                </a:lnTo>
+                <a:lnTo>
+                  <a:pt x="3953749" y="0"/>
+                </a:lnTo>
+                <a:lnTo>
+                  <a:pt x="3964435" y="0"/>
+                </a:lnTo>
+                <a:lnTo>
+                  <a:pt x="3975121" y="0"/>
+                </a:lnTo>
+                <a:lnTo>
+                  <a:pt x="3985807" y="0"/>
+                </a:lnTo>
+                <a:lnTo>
+                  <a:pt x="3996492" y="0"/>
+                </a:lnTo>
+                <a:lnTo>
+                  <a:pt x="4007178" y="0"/>
+                </a:lnTo>
+                <a:lnTo>
+                  <a:pt x="4017864" y="0"/>
+                </a:lnTo>
+                <a:lnTo>
+                  <a:pt x="4028550" y="0"/>
+                </a:lnTo>
+                <a:lnTo>
+                  <a:pt x="4039236" y="0"/>
+                </a:lnTo>
+                <a:lnTo>
+                  <a:pt x="4049921" y="0"/>
+                </a:lnTo>
+                <a:lnTo>
+                  <a:pt x="4060607" y="0"/>
+                </a:lnTo>
+                <a:lnTo>
+                  <a:pt x="4071293" y="0"/>
+                </a:lnTo>
+                <a:lnTo>
+                  <a:pt x="4081979" y="0"/>
+                </a:lnTo>
+                <a:lnTo>
+                  <a:pt x="4092665" y="0"/>
+                </a:lnTo>
+                <a:lnTo>
+                  <a:pt x="4103350" y="0"/>
+                </a:lnTo>
+                <a:lnTo>
+                  <a:pt x="4114036" y="0"/>
+                </a:lnTo>
+                <a:lnTo>
+                  <a:pt x="4124722" y="0"/>
+                </a:lnTo>
+                <a:lnTo>
+                  <a:pt x="4135408" y="0"/>
+                </a:lnTo>
+                <a:lnTo>
+                  <a:pt x="4146094" y="0"/>
+                </a:lnTo>
+                <a:lnTo>
+                  <a:pt x="4156779" y="0"/>
+                </a:lnTo>
+                <a:lnTo>
+                  <a:pt x="4167465" y="0"/>
+                </a:lnTo>
+                <a:lnTo>
+                  <a:pt x="4178151" y="0"/>
+                </a:lnTo>
+                <a:lnTo>
+                  <a:pt x="4188837" y="0"/>
+                </a:lnTo>
+                <a:lnTo>
+                  <a:pt x="4199523" y="0"/>
+                </a:lnTo>
+                <a:lnTo>
+                  <a:pt x="4210209" y="0"/>
+                </a:lnTo>
+                <a:lnTo>
+                  <a:pt x="4220894" y="0"/>
+                </a:lnTo>
+                <a:lnTo>
+                  <a:pt x="4231580" y="0"/>
+                </a:lnTo>
+                <a:lnTo>
+                  <a:pt x="4242266" y="0"/>
+                </a:lnTo>
+                <a:lnTo>
+                  <a:pt x="4252952" y="0"/>
+                </a:lnTo>
+                <a:lnTo>
+                  <a:pt x="4263638" y="0"/>
+                </a:lnTo>
+                <a:lnTo>
+                  <a:pt x="4274323" y="0"/>
+                </a:lnTo>
+                <a:lnTo>
+                  <a:pt x="4285009" y="0"/>
+                </a:lnTo>
+                <a:lnTo>
+                  <a:pt x="4295695" y="0"/>
+                </a:lnTo>
+                <a:lnTo>
+                  <a:pt x="4306381" y="0"/>
+                </a:lnTo>
+                <a:lnTo>
+                  <a:pt x="4317067" y="0"/>
+                </a:lnTo>
+                <a:lnTo>
+                  <a:pt x="4327752" y="0"/>
+                </a:lnTo>
+                <a:lnTo>
+                  <a:pt x="4338438" y="0"/>
+                </a:lnTo>
+                <a:lnTo>
+                  <a:pt x="4349124" y="0"/>
+                </a:lnTo>
+                <a:lnTo>
+                  <a:pt x="4359810" y="0"/>
+                </a:lnTo>
+                <a:lnTo>
+                  <a:pt x="4370496" y="0"/>
+                </a:lnTo>
+                <a:lnTo>
+                  <a:pt x="4381181" y="0"/>
+                </a:lnTo>
+                <a:lnTo>
+                  <a:pt x="4391867" y="0"/>
+                </a:lnTo>
+                <a:lnTo>
+                  <a:pt x="4402553" y="0"/>
+                </a:lnTo>
+                <a:lnTo>
+                  <a:pt x="4413239" y="0"/>
+                </a:lnTo>
+                <a:lnTo>
+                  <a:pt x="4423925" y="0"/>
+                </a:lnTo>
+                <a:lnTo>
+                  <a:pt x="4434611" y="0"/>
+                </a:lnTo>
+                <a:lnTo>
+                  <a:pt x="4445296" y="0"/>
+                </a:lnTo>
+                <a:lnTo>
+                  <a:pt x="4455982" y="0"/>
+                </a:lnTo>
+                <a:lnTo>
+                  <a:pt x="4466668" y="0"/>
+                </a:lnTo>
+                <a:lnTo>
+                  <a:pt x="4477354" y="0"/>
+                </a:lnTo>
+                <a:lnTo>
+                  <a:pt x="4488040" y="0"/>
+                </a:lnTo>
+                <a:lnTo>
+                  <a:pt x="4498725" y="0"/>
+                </a:lnTo>
+                <a:lnTo>
+                  <a:pt x="4509411" y="0"/>
+                </a:lnTo>
+                <a:lnTo>
+                  <a:pt x="4520097" y="0"/>
+                </a:lnTo>
+                <a:lnTo>
+                  <a:pt x="4530783" y="0"/>
+                </a:lnTo>
+                <a:lnTo>
+                  <a:pt x="4541469" y="0"/>
+                </a:lnTo>
+                <a:lnTo>
+                  <a:pt x="4552154" y="0"/>
+                </a:lnTo>
+                <a:lnTo>
+                  <a:pt x="4562840" y="0"/>
+                </a:lnTo>
+                <a:lnTo>
+                  <a:pt x="4573526" y="0"/>
+                </a:lnTo>
+                <a:lnTo>
+                  <a:pt x="4584212" y="0"/>
+                </a:lnTo>
+                <a:lnTo>
+                  <a:pt x="4594898" y="0"/>
+                </a:lnTo>
+                <a:lnTo>
+                  <a:pt x="4605583" y="0"/>
+                </a:lnTo>
+                <a:lnTo>
+                  <a:pt x="4616269" y="0"/>
+                </a:lnTo>
+                <a:lnTo>
+                  <a:pt x="4626955" y="0"/>
+                </a:lnTo>
+                <a:lnTo>
+                  <a:pt x="4637641" y="0"/>
+                </a:lnTo>
+                <a:lnTo>
+                  <a:pt x="4648327" y="0"/>
+                </a:lnTo>
+                <a:lnTo>
+                  <a:pt x="4659013" y="0"/>
+                </a:lnTo>
+                <a:lnTo>
+                  <a:pt x="4669698" y="0"/>
+                </a:lnTo>
+                <a:lnTo>
+                  <a:pt x="4680384" y="0"/>
+                </a:lnTo>
+                <a:lnTo>
+                  <a:pt x="4691070" y="0"/>
+                </a:lnTo>
+                <a:lnTo>
+                  <a:pt x="4701756" y="0"/>
+                </a:lnTo>
+                <a:lnTo>
+                  <a:pt x="4712442" y="0"/>
+                </a:lnTo>
+                <a:lnTo>
+                  <a:pt x="4723127" y="0"/>
+                </a:lnTo>
+                <a:lnTo>
+                  <a:pt x="4733813" y="0"/>
+                </a:lnTo>
+                <a:lnTo>
+                  <a:pt x="4744499" y="0"/>
+                </a:lnTo>
+                <a:lnTo>
+                  <a:pt x="4755185" y="0"/>
+                </a:lnTo>
+                <a:lnTo>
+                  <a:pt x="4765871" y="0"/>
+                </a:lnTo>
+                <a:lnTo>
+                  <a:pt x="4776556" y="0"/>
+                </a:lnTo>
+                <a:lnTo>
+                  <a:pt x="4787242" y="0"/>
+                </a:lnTo>
+                <a:lnTo>
+                  <a:pt x="4797928" y="0"/>
+                </a:lnTo>
+                <a:lnTo>
+                  <a:pt x="4808614" y="2971800"/>
+                </a:lnTo>
+                <a:lnTo>
+                  <a:pt x="4819300" y="2971800"/>
+                </a:lnTo>
+                <a:lnTo>
+                  <a:pt x="4829985" y="2971800"/>
+                </a:lnTo>
+                <a:lnTo>
+                  <a:pt x="4840671" y="2971800"/>
+                </a:lnTo>
+                <a:lnTo>
+                  <a:pt x="4851357" y="2971800"/>
+                </a:lnTo>
+                <a:lnTo>
+                  <a:pt x="4862043" y="2971800"/>
+                </a:lnTo>
+                <a:lnTo>
+                  <a:pt x="4872729" y="2971800"/>
+                </a:lnTo>
+                <a:lnTo>
+                  <a:pt x="4883415" y="2971800"/>
+                </a:lnTo>
+                <a:lnTo>
+                  <a:pt x="4894100" y="2971800"/>
+                </a:lnTo>
+                <a:lnTo>
+                  <a:pt x="4904786" y="2971800"/>
+                </a:lnTo>
+                <a:lnTo>
+                  <a:pt x="4915472" y="2971800"/>
+                </a:lnTo>
+                <a:lnTo>
+                  <a:pt x="4926158" y="2971800"/>
+                </a:lnTo>
+                <a:lnTo>
+                  <a:pt x="4936844" y="2971800"/>
+                </a:lnTo>
+                <a:lnTo>
+                  <a:pt x="4947529" y="2971800"/>
+                </a:lnTo>
+                <a:lnTo>
+                  <a:pt x="4958215" y="2971800"/>
+                </a:lnTo>
+                <a:lnTo>
+                  <a:pt x="4968901" y="2971800"/>
+                </a:lnTo>
+                <a:lnTo>
+                  <a:pt x="4979587" y="2971800"/>
+                </a:lnTo>
+                <a:lnTo>
+                  <a:pt x="4990273" y="2971800"/>
+                </a:lnTo>
+                <a:lnTo>
+                  <a:pt x="5000958" y="2971800"/>
+                </a:lnTo>
+                <a:lnTo>
+                  <a:pt x="5011644" y="2971800"/>
+                </a:lnTo>
+                <a:lnTo>
+                  <a:pt x="5022330" y="2971800"/>
+                </a:lnTo>
+                <a:lnTo>
+                  <a:pt x="5033016" y="2971800"/>
+                </a:lnTo>
+                <a:lnTo>
+                  <a:pt x="5043702" y="2971800"/>
+                </a:lnTo>
+                <a:lnTo>
+                  <a:pt x="5054387" y="2971800"/>
+                </a:lnTo>
+                <a:lnTo>
+                  <a:pt x="5065073" y="2971800"/>
+                </a:lnTo>
+                <a:lnTo>
+                  <a:pt x="5075759" y="2971800"/>
+                </a:lnTo>
+                <a:lnTo>
+                  <a:pt x="5086445" y="2971800"/>
+                </a:lnTo>
+                <a:lnTo>
+                  <a:pt x="5097131" y="2971800"/>
+                </a:lnTo>
+                <a:lnTo>
+                  <a:pt x="5107817" y="2971800"/>
+                </a:lnTo>
+                <a:lnTo>
+                  <a:pt x="5118502" y="2971800"/>
+                </a:lnTo>
+                <a:lnTo>
+                  <a:pt x="5129188" y="2971800"/>
+                </a:lnTo>
+                <a:lnTo>
+                  <a:pt x="5139874" y="2971800"/>
+                </a:lnTo>
+                <a:lnTo>
+                  <a:pt x="5150560" y="2971800"/>
+                </a:lnTo>
+                <a:lnTo>
+                  <a:pt x="5161246" y="2971800"/>
+                </a:lnTo>
+                <a:lnTo>
+                  <a:pt x="5171931" y="2971800"/>
+                </a:lnTo>
+                <a:lnTo>
+                  <a:pt x="5182617" y="2971800"/>
+                </a:lnTo>
+                <a:lnTo>
+                  <a:pt x="5193303" y="2971800"/>
+                </a:lnTo>
+                <a:lnTo>
+                  <a:pt x="5203989" y="2971800"/>
+                </a:lnTo>
+                <a:lnTo>
+                  <a:pt x="5214675" y="2971800"/>
+                </a:lnTo>
+                <a:lnTo>
+                  <a:pt x="5225360" y="2971800"/>
+                </a:lnTo>
+                <a:lnTo>
+                  <a:pt x="5236046" y="2971800"/>
+                </a:lnTo>
+                <a:lnTo>
+                  <a:pt x="5246732" y="2971800"/>
+                </a:lnTo>
+                <a:lnTo>
+                  <a:pt x="5257418" y="2971800"/>
+                </a:lnTo>
+                <a:lnTo>
+                  <a:pt x="5268104" y="2971800"/>
+                </a:lnTo>
+                <a:lnTo>
+                  <a:pt x="5278789" y="2971800"/>
+                </a:lnTo>
+                <a:lnTo>
+                  <a:pt x="5289475" y="2971800"/>
+                </a:lnTo>
+                <a:lnTo>
+                  <a:pt x="5300161" y="2971800"/>
+                </a:lnTo>
+                <a:lnTo>
+                  <a:pt x="5310847" y="2971800"/>
+                </a:lnTo>
+                <a:lnTo>
+                  <a:pt x="5321533" y="2971800"/>
+                </a:lnTo>
+                <a:lnTo>
+                  <a:pt x="5332219" y="2971800"/>
+                </a:lnTo>
+                <a:lnTo>
+                  <a:pt x="5342904" y="2971800"/>
+                </a:lnTo>
+                <a:lnTo>
+                  <a:pt x="5353590" y="2971800"/>
+                </a:lnTo>
+                <a:lnTo>
+                  <a:pt x="5364276" y="2971800"/>
+                </a:lnTo>
+                <a:lnTo>
+                  <a:pt x="5374962" y="2971800"/>
+                </a:lnTo>
+                <a:lnTo>
+                  <a:pt x="5385648" y="2971800"/>
+                </a:lnTo>
+                <a:lnTo>
+                  <a:pt x="5396333" y="2971800"/>
+                </a:lnTo>
+                <a:lnTo>
+                  <a:pt x="5407019" y="2971800"/>
+                </a:lnTo>
+                <a:lnTo>
+                  <a:pt x="5417705" y="2971800"/>
+                </a:lnTo>
+                <a:lnTo>
+                  <a:pt x="5428391" y="2971800"/>
+                </a:lnTo>
+                <a:lnTo>
+                  <a:pt x="5439077" y="2971800"/>
+                </a:lnTo>
+                <a:lnTo>
+                  <a:pt x="5449762" y="2971800"/>
+                </a:lnTo>
+                <a:lnTo>
+                  <a:pt x="5460448" y="2971800"/>
+                </a:lnTo>
+                <a:lnTo>
+                  <a:pt x="5471134" y="2971800"/>
+                </a:lnTo>
+                <a:lnTo>
+                  <a:pt x="5481820" y="2971800"/>
+                </a:lnTo>
+                <a:lnTo>
+                  <a:pt x="5492506" y="2971800"/>
+                </a:lnTo>
+                <a:lnTo>
+                  <a:pt x="5503191" y="2971800"/>
+                </a:lnTo>
+                <a:lnTo>
+                  <a:pt x="5513877" y="2971800"/>
+                </a:lnTo>
+                <a:lnTo>
+                  <a:pt x="5524563" y="2971800"/>
+                </a:lnTo>
+                <a:lnTo>
+                  <a:pt x="5535249" y="2971800"/>
+                </a:lnTo>
+                <a:lnTo>
+                  <a:pt x="5545935" y="2971800"/>
+                </a:lnTo>
+                <a:lnTo>
+                  <a:pt x="5556621" y="2971800"/>
+                </a:lnTo>
+                <a:lnTo>
+                  <a:pt x="5567306" y="2971800"/>
+                </a:lnTo>
+                <a:lnTo>
+                  <a:pt x="5577992" y="2971800"/>
+                </a:lnTo>
+                <a:lnTo>
+                  <a:pt x="5588678" y="2971800"/>
+                </a:lnTo>
+                <a:lnTo>
+                  <a:pt x="5599364" y="2971800"/>
+                </a:lnTo>
+                <a:lnTo>
+                  <a:pt x="5610050" y="2971800"/>
+                </a:lnTo>
+                <a:lnTo>
+                  <a:pt x="5620735" y="2971800"/>
+                </a:lnTo>
+                <a:lnTo>
+                  <a:pt x="5631421" y="2971800"/>
+                </a:lnTo>
+                <a:lnTo>
+                  <a:pt x="5642107" y="2971800"/>
+                </a:lnTo>
+                <a:lnTo>
+                  <a:pt x="5652793" y="2971800"/>
+                </a:lnTo>
+                <a:lnTo>
+                  <a:pt x="5663479" y="2971800"/>
+                </a:lnTo>
+                <a:lnTo>
+                  <a:pt x="5674164" y="2971800"/>
+                </a:lnTo>
+                <a:lnTo>
+                  <a:pt x="5684850" y="2971800"/>
+                </a:lnTo>
+                <a:lnTo>
+                  <a:pt x="5695536" y="2971800"/>
+                </a:lnTo>
+                <a:lnTo>
+                  <a:pt x="5706222" y="2971800"/>
+                </a:lnTo>
+                <a:lnTo>
+                  <a:pt x="5716908" y="2971800"/>
+                </a:lnTo>
+                <a:lnTo>
+                  <a:pt x="5727593" y="2971800"/>
+                </a:lnTo>
+                <a:lnTo>
+                  <a:pt x="5738279" y="2971800"/>
+                </a:lnTo>
+                <a:lnTo>
+                  <a:pt x="5748965" y="2971800"/>
+                </a:lnTo>
+                <a:lnTo>
+                  <a:pt x="5759651" y="2971800"/>
+                </a:lnTo>
+                <a:lnTo>
+                  <a:pt x="5770337" y="2971800"/>
+                </a:lnTo>
+                <a:lnTo>
+                  <a:pt x="5781023" y="2971800"/>
+                </a:lnTo>
+                <a:lnTo>
+                  <a:pt x="5791708" y="2971800"/>
+                </a:lnTo>
+                <a:lnTo>
+                  <a:pt x="5802394" y="2971800"/>
+                </a:lnTo>
+                <a:lnTo>
+                  <a:pt x="5813080" y="2971800"/>
+                </a:lnTo>
+                <a:lnTo>
+                  <a:pt x="5823766" y="2971800"/>
+                </a:lnTo>
+                <a:lnTo>
+                  <a:pt x="5834452" y="2971800"/>
+                </a:lnTo>
+                <a:lnTo>
+                  <a:pt x="5845137" y="2971800"/>
+                </a:lnTo>
+                <a:lnTo>
+                  <a:pt x="5855823" y="2971800"/>
+                </a:lnTo>
+                <a:lnTo>
+                  <a:pt x="5866509" y="2971800"/>
+                </a:lnTo>
+                <a:lnTo>
+                  <a:pt x="5877195" y="2971800"/>
+                </a:lnTo>
+                <a:lnTo>
+                  <a:pt x="5887881" y="2971800"/>
+                </a:lnTo>
+                <a:lnTo>
+                  <a:pt x="5898566" y="2971800"/>
+                </a:lnTo>
+                <a:lnTo>
+                  <a:pt x="5909252" y="2971800"/>
+                </a:lnTo>
+                <a:lnTo>
+                  <a:pt x="5919938" y="2971800"/>
+                </a:lnTo>
+                <a:lnTo>
+                  <a:pt x="5930624" y="2971800"/>
+                </a:lnTo>
+                <a:lnTo>
+                  <a:pt x="5941310" y="2971800"/>
+                </a:lnTo>
+                <a:lnTo>
+                  <a:pt x="5951995" y="2971800"/>
+                </a:lnTo>
+                <a:lnTo>
+                  <a:pt x="5962681" y="2971800"/>
+                </a:lnTo>
+                <a:lnTo>
+                  <a:pt x="5973367" y="2971800"/>
+                </a:lnTo>
+                <a:lnTo>
+                  <a:pt x="5984053" y="2971800"/>
+                </a:lnTo>
+                <a:lnTo>
+                  <a:pt x="5994739" y="2971800"/>
+                </a:lnTo>
+                <a:lnTo>
+                  <a:pt x="6005425" y="2971800"/>
+                </a:lnTo>
+                <a:lnTo>
+                  <a:pt x="6016110" y="2971800"/>
+                </a:lnTo>
+                <a:lnTo>
+                  <a:pt x="6026796" y="2971800"/>
+                </a:lnTo>
+                <a:lnTo>
+                  <a:pt x="6037482" y="2971800"/>
+                </a:lnTo>
+                <a:lnTo>
+                  <a:pt x="6048168" y="2971800"/>
+                </a:lnTo>
+                <a:lnTo>
+                  <a:pt x="6058854" y="2971800"/>
+                </a:lnTo>
+                <a:lnTo>
+                  <a:pt x="6069539" y="2971800"/>
+                </a:lnTo>
+                <a:lnTo>
+                  <a:pt x="6080225" y="2971800"/>
+                </a:lnTo>
+                <a:lnTo>
+                  <a:pt x="6090911" y="2971800"/>
+                </a:lnTo>
+                <a:lnTo>
+                  <a:pt x="6101597" y="2971800"/>
+                </a:lnTo>
+                <a:lnTo>
+                  <a:pt x="6112283" y="2971800"/>
+                </a:lnTo>
+                <a:lnTo>
+                  <a:pt x="6122968" y="2971800"/>
+                </a:lnTo>
+                <a:lnTo>
+                  <a:pt x="6133654" y="2971800"/>
+                </a:lnTo>
+                <a:lnTo>
+                  <a:pt x="6144340" y="2971800"/>
+                </a:lnTo>
+                <a:lnTo>
+                  <a:pt x="6155026" y="2971800"/>
+                </a:lnTo>
+                <a:lnTo>
+                  <a:pt x="6165712" y="2971800"/>
+                </a:lnTo>
+                <a:lnTo>
+                  <a:pt x="6176397" y="2971800"/>
+                </a:lnTo>
+                <a:lnTo>
+                  <a:pt x="6187083" y="2971800"/>
+                </a:lnTo>
+                <a:lnTo>
+                  <a:pt x="6197769" y="2971800"/>
+                </a:lnTo>
+                <a:lnTo>
+                  <a:pt x="6208455" y="2971800"/>
+                </a:lnTo>
+                <a:lnTo>
+                  <a:pt x="6219141" y="2971800"/>
+                </a:lnTo>
+                <a:lnTo>
+                  <a:pt x="6229827" y="2971800"/>
+                </a:lnTo>
+                <a:lnTo>
+                  <a:pt x="6240512" y="2971800"/>
+                </a:lnTo>
+                <a:lnTo>
+                  <a:pt x="6251198" y="2971800"/>
+                </a:lnTo>
+                <a:lnTo>
+                  <a:pt x="6261884" y="2971800"/>
+                </a:lnTo>
+                <a:lnTo>
+                  <a:pt x="6272570" y="2971800"/>
+                </a:lnTo>
+                <a:lnTo>
+                  <a:pt x="6283256" y="2971800"/>
+                </a:lnTo>
+                <a:lnTo>
+                  <a:pt x="6293941" y="2971800"/>
+                </a:lnTo>
+                <a:lnTo>
+                  <a:pt x="6304627" y="2971800"/>
+                </a:lnTo>
+                <a:lnTo>
+                  <a:pt x="6315313" y="2971800"/>
+                </a:lnTo>
+                <a:lnTo>
+                  <a:pt x="6325999" y="2971800"/>
+                </a:lnTo>
+                <a:lnTo>
+                  <a:pt x="6336685" y="2971800"/>
+                </a:lnTo>
+                <a:lnTo>
+                  <a:pt x="6347370" y="2971800"/>
+                </a:lnTo>
+                <a:lnTo>
+                  <a:pt x="6358056" y="2971800"/>
+                </a:lnTo>
+                <a:lnTo>
+                  <a:pt x="6368742" y="2971800"/>
+                </a:lnTo>
+                <a:lnTo>
+                  <a:pt x="6379428" y="2971800"/>
+                </a:lnTo>
+                <a:lnTo>
+                  <a:pt x="6390114" y="2971800"/>
+                </a:lnTo>
+                <a:lnTo>
+                  <a:pt x="6400800" y="2971800"/>
+                </a:lnTo>
+                <a:lnTo>
+                  <a:pt x="6400800" y="2971800"/>
+                </a:lnTo>
+                <a:lnTo>
+                  <a:pt x="6390114" y="2971800"/>
+                </a:lnTo>
+                <a:lnTo>
+                  <a:pt x="6379428" y="2971800"/>
+                </a:lnTo>
+                <a:lnTo>
+                  <a:pt x="6368742" y="2971800"/>
+                </a:lnTo>
+                <a:lnTo>
+                  <a:pt x="6358056" y="2971800"/>
+                </a:lnTo>
+                <a:lnTo>
+                  <a:pt x="6347370" y="2971800"/>
+                </a:lnTo>
+                <a:lnTo>
+                  <a:pt x="6336685" y="2971800"/>
+                </a:lnTo>
+                <a:lnTo>
+                  <a:pt x="6325999" y="2971800"/>
+                </a:lnTo>
+                <a:lnTo>
+                  <a:pt x="6315313" y="2971800"/>
+                </a:lnTo>
+                <a:lnTo>
+                  <a:pt x="6304627" y="2971800"/>
+                </a:lnTo>
+                <a:lnTo>
+                  <a:pt x="6293941" y="2971800"/>
+                </a:lnTo>
+                <a:lnTo>
+                  <a:pt x="6283256" y="2971800"/>
+                </a:lnTo>
+                <a:lnTo>
+                  <a:pt x="6272570" y="2971800"/>
+                </a:lnTo>
+                <a:lnTo>
+                  <a:pt x="6261884" y="2971800"/>
+                </a:lnTo>
+                <a:lnTo>
+                  <a:pt x="6251198" y="2971800"/>
+                </a:lnTo>
+                <a:lnTo>
+                  <a:pt x="6240512" y="2971800"/>
+                </a:lnTo>
+                <a:lnTo>
+                  <a:pt x="6229827" y="2971800"/>
+                </a:lnTo>
+                <a:lnTo>
+                  <a:pt x="6219141" y="2971800"/>
+                </a:lnTo>
+                <a:lnTo>
+                  <a:pt x="6208455" y="2971800"/>
+                </a:lnTo>
+                <a:lnTo>
+                  <a:pt x="6197769" y="2971800"/>
+                </a:lnTo>
+                <a:lnTo>
+                  <a:pt x="6187083" y="2971800"/>
+                </a:lnTo>
+                <a:lnTo>
+                  <a:pt x="6176397" y="2971800"/>
+                </a:lnTo>
+                <a:lnTo>
+                  <a:pt x="6165712" y="2971800"/>
+                </a:lnTo>
+                <a:lnTo>
+                  <a:pt x="6155026" y="2971800"/>
+                </a:lnTo>
+                <a:lnTo>
+                  <a:pt x="6144340" y="2971800"/>
+                </a:lnTo>
+                <a:lnTo>
+                  <a:pt x="6133654" y="2971800"/>
+                </a:lnTo>
+                <a:lnTo>
+                  <a:pt x="6122968" y="2971800"/>
+                </a:lnTo>
+                <a:lnTo>
+                  <a:pt x="6112283" y="2971800"/>
+                </a:lnTo>
+                <a:lnTo>
+                  <a:pt x="6101597" y="2971800"/>
+                </a:lnTo>
+                <a:lnTo>
+                  <a:pt x="6090911" y="2971800"/>
+                </a:lnTo>
+                <a:lnTo>
+                  <a:pt x="6080225" y="2971800"/>
+                </a:lnTo>
+                <a:lnTo>
+                  <a:pt x="6069539" y="2971800"/>
+                </a:lnTo>
+                <a:lnTo>
+                  <a:pt x="6058854" y="2971800"/>
+                </a:lnTo>
+                <a:lnTo>
+                  <a:pt x="6048168" y="2971800"/>
+                </a:lnTo>
+                <a:lnTo>
+                  <a:pt x="6037482" y="2971800"/>
+                </a:lnTo>
+                <a:lnTo>
+                  <a:pt x="6026796" y="2971800"/>
+                </a:lnTo>
+                <a:lnTo>
+                  <a:pt x="6016110" y="2971800"/>
+                </a:lnTo>
+                <a:lnTo>
+                  <a:pt x="6005425" y="2971800"/>
+                </a:lnTo>
+                <a:lnTo>
+                  <a:pt x="5994739" y="2971800"/>
+                </a:lnTo>
+                <a:lnTo>
+                  <a:pt x="5984053" y="2971800"/>
+                </a:lnTo>
+                <a:lnTo>
+                  <a:pt x="5973367" y="2971800"/>
+                </a:lnTo>
+                <a:lnTo>
+                  <a:pt x="5962681" y="2971800"/>
+                </a:lnTo>
+                <a:lnTo>
+                  <a:pt x="5951995" y="2971800"/>
+                </a:lnTo>
+                <a:lnTo>
+                  <a:pt x="5941310" y="2971800"/>
+                </a:lnTo>
+                <a:lnTo>
+                  <a:pt x="5930624" y="2971800"/>
+                </a:lnTo>
+                <a:lnTo>
+                  <a:pt x="5919938" y="2971800"/>
+                </a:lnTo>
+                <a:lnTo>
+                  <a:pt x="5909252" y="2971800"/>
+                </a:lnTo>
+                <a:lnTo>
+                  <a:pt x="5898566" y="2971800"/>
+                </a:lnTo>
+                <a:lnTo>
+                  <a:pt x="5887881" y="2971800"/>
+                </a:lnTo>
+                <a:lnTo>
+                  <a:pt x="5877195" y="2971800"/>
+                </a:lnTo>
+                <a:lnTo>
+                  <a:pt x="5866509" y="2971800"/>
+                </a:lnTo>
+                <a:lnTo>
+                  <a:pt x="5855823" y="2971800"/>
+                </a:lnTo>
+                <a:lnTo>
+                  <a:pt x="5845137" y="2971800"/>
+                </a:lnTo>
+                <a:lnTo>
+                  <a:pt x="5834452" y="2971800"/>
+                </a:lnTo>
+                <a:lnTo>
+                  <a:pt x="5823766" y="2971800"/>
+                </a:lnTo>
+                <a:lnTo>
+                  <a:pt x="5813080" y="2971800"/>
+                </a:lnTo>
+                <a:lnTo>
+                  <a:pt x="5802394" y="2971800"/>
+                </a:lnTo>
+                <a:lnTo>
+                  <a:pt x="5791708" y="2971800"/>
+                </a:lnTo>
+                <a:lnTo>
+                  <a:pt x="5781023" y="2971800"/>
+                </a:lnTo>
+                <a:lnTo>
+                  <a:pt x="5770337" y="2971800"/>
+                </a:lnTo>
+                <a:lnTo>
+                  <a:pt x="5759651" y="2971800"/>
+                </a:lnTo>
+                <a:lnTo>
+                  <a:pt x="5748965" y="2971800"/>
+                </a:lnTo>
+                <a:lnTo>
+                  <a:pt x="5738279" y="2971800"/>
+                </a:lnTo>
+                <a:lnTo>
+                  <a:pt x="5727593" y="2971800"/>
+                </a:lnTo>
+                <a:lnTo>
+                  <a:pt x="5716908" y="2971800"/>
+                </a:lnTo>
+                <a:lnTo>
+                  <a:pt x="5706222" y="2971800"/>
+                </a:lnTo>
+                <a:lnTo>
+                  <a:pt x="5695536" y="2971800"/>
+                </a:lnTo>
+                <a:lnTo>
+                  <a:pt x="5684850" y="2971800"/>
+                </a:lnTo>
+                <a:lnTo>
+                  <a:pt x="5674164" y="2971800"/>
+                </a:lnTo>
+                <a:lnTo>
+                  <a:pt x="5663479" y="2971800"/>
+                </a:lnTo>
+                <a:lnTo>
+                  <a:pt x="5652793" y="2971800"/>
+                </a:lnTo>
+                <a:lnTo>
+                  <a:pt x="5642107" y="2971800"/>
+                </a:lnTo>
+                <a:lnTo>
+                  <a:pt x="5631421" y="2971800"/>
+                </a:lnTo>
+                <a:lnTo>
+                  <a:pt x="5620735" y="2971800"/>
+                </a:lnTo>
+                <a:lnTo>
+                  <a:pt x="5610050" y="2971800"/>
+                </a:lnTo>
+                <a:lnTo>
+                  <a:pt x="5599364" y="2971800"/>
+                </a:lnTo>
+                <a:lnTo>
+                  <a:pt x="5588678" y="2971800"/>
+                </a:lnTo>
+                <a:lnTo>
+                  <a:pt x="5577992" y="2971800"/>
+                </a:lnTo>
+                <a:lnTo>
+                  <a:pt x="5567306" y="2971800"/>
+                </a:lnTo>
+                <a:lnTo>
+                  <a:pt x="5556621" y="2971800"/>
+                </a:lnTo>
+                <a:lnTo>
+                  <a:pt x="5545935" y="2971800"/>
+                </a:lnTo>
+                <a:lnTo>
+                  <a:pt x="5535249" y="2971800"/>
+                </a:lnTo>
+                <a:lnTo>
+                  <a:pt x="5524563" y="2971800"/>
+                </a:lnTo>
+                <a:lnTo>
+                  <a:pt x="5513877" y="2971800"/>
+                </a:lnTo>
+                <a:lnTo>
+                  <a:pt x="5503191" y="2971800"/>
+                </a:lnTo>
+                <a:lnTo>
+                  <a:pt x="5492506" y="2971800"/>
+                </a:lnTo>
+                <a:lnTo>
+                  <a:pt x="5481820" y="2971800"/>
+                </a:lnTo>
+                <a:lnTo>
+                  <a:pt x="5471134" y="2971800"/>
+                </a:lnTo>
+                <a:lnTo>
+                  <a:pt x="5460448" y="2971800"/>
+                </a:lnTo>
+                <a:lnTo>
+                  <a:pt x="5449762" y="2971800"/>
+                </a:lnTo>
+                <a:lnTo>
+                  <a:pt x="5439077" y="2971800"/>
+                </a:lnTo>
+                <a:lnTo>
+                  <a:pt x="5428391" y="2971800"/>
+                </a:lnTo>
+                <a:lnTo>
+                  <a:pt x="5417705" y="2971800"/>
+                </a:lnTo>
+                <a:lnTo>
+                  <a:pt x="5407019" y="2971800"/>
+                </a:lnTo>
+                <a:lnTo>
+                  <a:pt x="5396333" y="2971800"/>
+                </a:lnTo>
+                <a:lnTo>
+                  <a:pt x="5385648" y="2971800"/>
+                </a:lnTo>
+                <a:lnTo>
+                  <a:pt x="5374962" y="2971800"/>
+                </a:lnTo>
+                <a:lnTo>
+                  <a:pt x="5364276" y="2971800"/>
+                </a:lnTo>
+                <a:lnTo>
+                  <a:pt x="5353590" y="2971800"/>
+                </a:lnTo>
+                <a:lnTo>
+                  <a:pt x="5342904" y="2971800"/>
+                </a:lnTo>
+                <a:lnTo>
+                  <a:pt x="5332219" y="2971800"/>
+                </a:lnTo>
+                <a:lnTo>
+                  <a:pt x="5321533" y="2971800"/>
+                </a:lnTo>
+                <a:lnTo>
+                  <a:pt x="5310847" y="2971800"/>
+                </a:lnTo>
+                <a:lnTo>
+                  <a:pt x="5300161" y="2971800"/>
+                </a:lnTo>
+                <a:lnTo>
+                  <a:pt x="5289475" y="2971800"/>
+                </a:lnTo>
+                <a:lnTo>
+                  <a:pt x="5278789" y="2971800"/>
+                </a:lnTo>
+                <a:lnTo>
+                  <a:pt x="5268104" y="2971800"/>
+                </a:lnTo>
+                <a:lnTo>
+                  <a:pt x="5257418" y="2971800"/>
+                </a:lnTo>
+                <a:lnTo>
+                  <a:pt x="5246732" y="2971800"/>
+                </a:lnTo>
+                <a:lnTo>
+                  <a:pt x="5236046" y="2971800"/>
+                </a:lnTo>
+                <a:lnTo>
+                  <a:pt x="5225360" y="2971800"/>
+                </a:lnTo>
+                <a:lnTo>
+                  <a:pt x="5214675" y="2971800"/>
+                </a:lnTo>
+                <a:lnTo>
+                  <a:pt x="5203989" y="2971800"/>
+                </a:lnTo>
+                <a:lnTo>
+                  <a:pt x="5193303" y="2971800"/>
+                </a:lnTo>
+                <a:lnTo>
+                  <a:pt x="5182617" y="2971800"/>
+                </a:lnTo>
+                <a:lnTo>
+                  <a:pt x="5171931" y="2971800"/>
+                </a:lnTo>
+                <a:lnTo>
+                  <a:pt x="5161246" y="2971800"/>
+                </a:lnTo>
+                <a:lnTo>
+                  <a:pt x="5150560" y="2971800"/>
+                </a:lnTo>
+                <a:lnTo>
+                  <a:pt x="5139874" y="2971800"/>
+                </a:lnTo>
+                <a:lnTo>
+                  <a:pt x="5129188" y="2971800"/>
+                </a:lnTo>
+                <a:lnTo>
+                  <a:pt x="5118502" y="2971800"/>
+                </a:lnTo>
+                <a:lnTo>
+                  <a:pt x="5107817" y="2971800"/>
+                </a:lnTo>
+                <a:lnTo>
+                  <a:pt x="5097131" y="2971800"/>
+                </a:lnTo>
+                <a:lnTo>
+                  <a:pt x="5086445" y="2971800"/>
+                </a:lnTo>
+                <a:lnTo>
+                  <a:pt x="5075759" y="2971800"/>
+                </a:lnTo>
+                <a:lnTo>
+                  <a:pt x="5065073" y="2971800"/>
+                </a:lnTo>
+                <a:lnTo>
+                  <a:pt x="5054387" y="2971800"/>
+                </a:lnTo>
+                <a:lnTo>
+                  <a:pt x="5043702" y="2971800"/>
+                </a:lnTo>
+                <a:lnTo>
+                  <a:pt x="5033016" y="2971800"/>
+                </a:lnTo>
+                <a:lnTo>
+                  <a:pt x="5022330" y="2971800"/>
+                </a:lnTo>
+                <a:lnTo>
+                  <a:pt x="5011644" y="2971800"/>
+                </a:lnTo>
+                <a:lnTo>
+                  <a:pt x="5000958" y="2971800"/>
+                </a:lnTo>
+                <a:lnTo>
+                  <a:pt x="4990273" y="2971800"/>
+                </a:lnTo>
+                <a:lnTo>
+                  <a:pt x="4979587" y="2971800"/>
+                </a:lnTo>
+                <a:lnTo>
+                  <a:pt x="4968901" y="2971800"/>
+                </a:lnTo>
+                <a:lnTo>
+                  <a:pt x="4958215" y="2971800"/>
+                </a:lnTo>
+                <a:lnTo>
+                  <a:pt x="4947529" y="2971800"/>
+                </a:lnTo>
+                <a:lnTo>
+                  <a:pt x="4936844" y="2971800"/>
+                </a:lnTo>
+                <a:lnTo>
+                  <a:pt x="4926158" y="2971800"/>
+                </a:lnTo>
+                <a:lnTo>
+                  <a:pt x="4915472" y="2971800"/>
+                </a:lnTo>
+                <a:lnTo>
+                  <a:pt x="4904786" y="2971800"/>
+                </a:lnTo>
+                <a:lnTo>
+                  <a:pt x="4894100" y="2971800"/>
+                </a:lnTo>
+                <a:lnTo>
+                  <a:pt x="4883415" y="2971800"/>
+                </a:lnTo>
+                <a:lnTo>
+                  <a:pt x="4872729" y="2971800"/>
+                </a:lnTo>
+                <a:lnTo>
+                  <a:pt x="4862043" y="2971800"/>
+                </a:lnTo>
+                <a:lnTo>
+                  <a:pt x="4851357" y="2971800"/>
+                </a:lnTo>
+                <a:lnTo>
+                  <a:pt x="4840671" y="2971800"/>
+                </a:lnTo>
+                <a:lnTo>
+                  <a:pt x="4829985" y="2971800"/>
+                </a:lnTo>
+                <a:lnTo>
+                  <a:pt x="4819300" y="2971800"/>
+                </a:lnTo>
+                <a:lnTo>
+                  <a:pt x="4808614" y="2971800"/>
+                </a:lnTo>
+                <a:lnTo>
+                  <a:pt x="4797928" y="2971800"/>
+                </a:lnTo>
+                <a:lnTo>
+                  <a:pt x="4787242" y="2971800"/>
+                </a:lnTo>
+                <a:lnTo>
+                  <a:pt x="4776556" y="2971800"/>
+                </a:lnTo>
+                <a:lnTo>
+                  <a:pt x="4765871" y="2971800"/>
+                </a:lnTo>
+                <a:lnTo>
+                  <a:pt x="4755185" y="2971800"/>
+                </a:lnTo>
+                <a:lnTo>
+                  <a:pt x="4744499" y="2971800"/>
+                </a:lnTo>
+                <a:lnTo>
+                  <a:pt x="4733813" y="2971800"/>
+                </a:lnTo>
+                <a:lnTo>
+                  <a:pt x="4723127" y="2971800"/>
+                </a:lnTo>
+                <a:lnTo>
+                  <a:pt x="4712442" y="2971800"/>
+                </a:lnTo>
+                <a:lnTo>
+                  <a:pt x="4701756" y="2971800"/>
+                </a:lnTo>
+                <a:lnTo>
+                  <a:pt x="4691070" y="2971800"/>
+                </a:lnTo>
+                <a:lnTo>
+                  <a:pt x="4680384" y="2971800"/>
+                </a:lnTo>
+                <a:lnTo>
+                  <a:pt x="4669698" y="2971800"/>
+                </a:lnTo>
+                <a:lnTo>
+                  <a:pt x="4659013" y="2971800"/>
+                </a:lnTo>
+                <a:lnTo>
+                  <a:pt x="4648327" y="2971800"/>
+                </a:lnTo>
+                <a:lnTo>
+                  <a:pt x="4637641" y="2971800"/>
+                </a:lnTo>
+                <a:lnTo>
+                  <a:pt x="4626955" y="2971800"/>
+                </a:lnTo>
+                <a:lnTo>
+                  <a:pt x="4616269" y="2971800"/>
+                </a:lnTo>
+                <a:lnTo>
+                  <a:pt x="4605583" y="2971800"/>
+                </a:lnTo>
+                <a:lnTo>
+                  <a:pt x="4594898" y="2971800"/>
+                </a:lnTo>
+                <a:lnTo>
+                  <a:pt x="4584212" y="2971800"/>
+                </a:lnTo>
+                <a:lnTo>
+                  <a:pt x="4573526" y="2971800"/>
+                </a:lnTo>
+                <a:lnTo>
+                  <a:pt x="4562840" y="2971800"/>
+                </a:lnTo>
+                <a:lnTo>
+                  <a:pt x="4552154" y="2971800"/>
+                </a:lnTo>
+                <a:lnTo>
+                  <a:pt x="4541469" y="2971800"/>
+                </a:lnTo>
+                <a:lnTo>
+                  <a:pt x="4530783" y="2971800"/>
+                </a:lnTo>
+                <a:lnTo>
+                  <a:pt x="4520097" y="2971800"/>
+                </a:lnTo>
+                <a:lnTo>
+                  <a:pt x="4509411" y="2971800"/>
+                </a:lnTo>
+                <a:lnTo>
+                  <a:pt x="4498725" y="2971800"/>
+                </a:lnTo>
+                <a:lnTo>
+                  <a:pt x="4488040" y="2971800"/>
+                </a:lnTo>
+                <a:lnTo>
+                  <a:pt x="4477354" y="2971800"/>
+                </a:lnTo>
+                <a:lnTo>
+                  <a:pt x="4466668" y="2971800"/>
+                </a:lnTo>
+                <a:lnTo>
+                  <a:pt x="4455982" y="2971800"/>
+                </a:lnTo>
+                <a:lnTo>
+                  <a:pt x="4445296" y="2971800"/>
+                </a:lnTo>
+                <a:lnTo>
+                  <a:pt x="4434611" y="2971800"/>
+                </a:lnTo>
+                <a:lnTo>
+                  <a:pt x="4423925" y="2971800"/>
+                </a:lnTo>
+                <a:lnTo>
+                  <a:pt x="4413239" y="2971800"/>
+                </a:lnTo>
+                <a:lnTo>
+                  <a:pt x="4402553" y="2971800"/>
+                </a:lnTo>
+                <a:lnTo>
+                  <a:pt x="4391867" y="2971800"/>
+                </a:lnTo>
+                <a:lnTo>
+                  <a:pt x="4381181" y="2971800"/>
+                </a:lnTo>
+                <a:lnTo>
+                  <a:pt x="4370496" y="2971800"/>
+                </a:lnTo>
+                <a:lnTo>
+                  <a:pt x="4359810" y="2971800"/>
+                </a:lnTo>
+                <a:lnTo>
+                  <a:pt x="4349124" y="2971800"/>
+                </a:lnTo>
+                <a:lnTo>
+                  <a:pt x="4338438" y="2971800"/>
+                </a:lnTo>
+                <a:lnTo>
+                  <a:pt x="4327752" y="2971800"/>
+                </a:lnTo>
+                <a:lnTo>
+                  <a:pt x="4317067" y="2971800"/>
+                </a:lnTo>
+                <a:lnTo>
+                  <a:pt x="4306381" y="2971800"/>
+                </a:lnTo>
+                <a:lnTo>
+                  <a:pt x="4295695" y="2971800"/>
+                </a:lnTo>
+                <a:lnTo>
+                  <a:pt x="4285009" y="2971800"/>
+                </a:lnTo>
+                <a:lnTo>
+                  <a:pt x="4274323" y="2971800"/>
+                </a:lnTo>
+                <a:lnTo>
+                  <a:pt x="4263638" y="2971800"/>
+                </a:lnTo>
+                <a:lnTo>
+                  <a:pt x="4252952" y="2971800"/>
+                </a:lnTo>
+                <a:lnTo>
+                  <a:pt x="4242266" y="2971800"/>
+                </a:lnTo>
+                <a:lnTo>
+                  <a:pt x="4231580" y="2971800"/>
+                </a:lnTo>
+                <a:lnTo>
+                  <a:pt x="4220894" y="2971800"/>
+                </a:lnTo>
+                <a:lnTo>
+                  <a:pt x="4210209" y="2971800"/>
+                </a:lnTo>
+                <a:lnTo>
+                  <a:pt x="4199523" y="2971800"/>
+                </a:lnTo>
+                <a:lnTo>
+                  <a:pt x="4188837" y="2971800"/>
+                </a:lnTo>
+                <a:lnTo>
+                  <a:pt x="4178151" y="2971800"/>
+                </a:lnTo>
+                <a:lnTo>
+                  <a:pt x="4167465" y="2971800"/>
+                </a:lnTo>
+                <a:lnTo>
+                  <a:pt x="4156779" y="2971800"/>
+                </a:lnTo>
+                <a:lnTo>
+                  <a:pt x="4146094" y="2971800"/>
+                </a:lnTo>
+                <a:lnTo>
+                  <a:pt x="4135408" y="2971800"/>
+                </a:lnTo>
+                <a:lnTo>
+                  <a:pt x="4124722" y="2971800"/>
+                </a:lnTo>
+                <a:lnTo>
+                  <a:pt x="4114036" y="2971800"/>
+                </a:lnTo>
+                <a:lnTo>
+                  <a:pt x="4103350" y="2971800"/>
+                </a:lnTo>
+                <a:lnTo>
+                  <a:pt x="4092665" y="2971800"/>
+                </a:lnTo>
+                <a:lnTo>
+                  <a:pt x="4081979" y="2971800"/>
+                </a:lnTo>
+                <a:lnTo>
+                  <a:pt x="4071293" y="2971800"/>
+                </a:lnTo>
+                <a:lnTo>
+                  <a:pt x="4060607" y="2971800"/>
+                </a:lnTo>
+                <a:lnTo>
+                  <a:pt x="4049921" y="2971800"/>
+                </a:lnTo>
+                <a:lnTo>
+                  <a:pt x="4039236" y="2971800"/>
+                </a:lnTo>
+                <a:lnTo>
+                  <a:pt x="4028550" y="2971800"/>
+                </a:lnTo>
+                <a:lnTo>
+                  <a:pt x="4017864" y="2971800"/>
+                </a:lnTo>
+                <a:lnTo>
+                  <a:pt x="4007178" y="2971800"/>
+                </a:lnTo>
+                <a:lnTo>
+                  <a:pt x="3996492" y="2971800"/>
+                </a:lnTo>
+                <a:lnTo>
+                  <a:pt x="3985807" y="2971800"/>
+                </a:lnTo>
+                <a:lnTo>
+                  <a:pt x="3975121" y="2971800"/>
+                </a:lnTo>
+                <a:lnTo>
+                  <a:pt x="3964435" y="2971800"/>
+                </a:lnTo>
+                <a:lnTo>
+                  <a:pt x="3953749" y="2971800"/>
+                </a:lnTo>
+                <a:lnTo>
+                  <a:pt x="3943063" y="2971800"/>
+                </a:lnTo>
+                <a:lnTo>
+                  <a:pt x="3932377" y="2971800"/>
+                </a:lnTo>
+                <a:lnTo>
+                  <a:pt x="3921692" y="2971800"/>
+                </a:lnTo>
+                <a:lnTo>
+                  <a:pt x="3911006" y="2971800"/>
+                </a:lnTo>
+                <a:lnTo>
+                  <a:pt x="3900320" y="2971800"/>
+                </a:lnTo>
+                <a:lnTo>
+                  <a:pt x="3889634" y="2971800"/>
+                </a:lnTo>
+                <a:lnTo>
+                  <a:pt x="3878948" y="2971800"/>
+                </a:lnTo>
+                <a:lnTo>
+                  <a:pt x="3868263" y="2971800"/>
+                </a:lnTo>
+                <a:lnTo>
+                  <a:pt x="3857577" y="2971800"/>
+                </a:lnTo>
+                <a:lnTo>
+                  <a:pt x="3846891" y="2971800"/>
+                </a:lnTo>
+                <a:lnTo>
+                  <a:pt x="3836205" y="2971800"/>
+                </a:lnTo>
+                <a:lnTo>
+                  <a:pt x="3825519" y="2971800"/>
+                </a:lnTo>
+                <a:lnTo>
+                  <a:pt x="3814834" y="2971800"/>
+                </a:lnTo>
+                <a:lnTo>
+                  <a:pt x="3804148" y="2971800"/>
+                </a:lnTo>
+                <a:lnTo>
+                  <a:pt x="3793462" y="2971800"/>
+                </a:lnTo>
+                <a:lnTo>
+                  <a:pt x="3782776" y="2971800"/>
+                </a:lnTo>
+                <a:lnTo>
+                  <a:pt x="3772090" y="2971800"/>
+                </a:lnTo>
+                <a:lnTo>
+                  <a:pt x="3761405" y="2971800"/>
+                </a:lnTo>
+                <a:lnTo>
+                  <a:pt x="3750719" y="2971800"/>
+                </a:lnTo>
+                <a:lnTo>
+                  <a:pt x="3740033" y="2971800"/>
+                </a:lnTo>
+                <a:lnTo>
+                  <a:pt x="3729347" y="2971800"/>
+                </a:lnTo>
+                <a:lnTo>
+                  <a:pt x="3718661" y="2971800"/>
+                </a:lnTo>
+                <a:lnTo>
+                  <a:pt x="3707975" y="2971800"/>
+                </a:lnTo>
+                <a:lnTo>
+                  <a:pt x="3697290" y="2971800"/>
+                </a:lnTo>
+                <a:lnTo>
+                  <a:pt x="3686604" y="2971800"/>
+                </a:lnTo>
+                <a:lnTo>
+                  <a:pt x="3675918" y="2971800"/>
+                </a:lnTo>
+                <a:lnTo>
+                  <a:pt x="3665232" y="2971800"/>
+                </a:lnTo>
+                <a:lnTo>
+                  <a:pt x="3654546" y="2971800"/>
+                </a:lnTo>
+                <a:lnTo>
+                  <a:pt x="3643861" y="2971800"/>
+                </a:lnTo>
+                <a:lnTo>
+                  <a:pt x="3633175" y="2971800"/>
+                </a:lnTo>
+                <a:lnTo>
+                  <a:pt x="3622489" y="2971800"/>
+                </a:lnTo>
+                <a:lnTo>
+                  <a:pt x="3611803" y="2971800"/>
+                </a:lnTo>
+                <a:lnTo>
+                  <a:pt x="3601117" y="2971800"/>
+                </a:lnTo>
+                <a:lnTo>
+                  <a:pt x="3590432" y="2971800"/>
+                </a:lnTo>
+                <a:lnTo>
+                  <a:pt x="3579746" y="2971800"/>
+                </a:lnTo>
+                <a:lnTo>
+                  <a:pt x="3569060" y="2971800"/>
+                </a:lnTo>
+                <a:lnTo>
+                  <a:pt x="3558374" y="2971800"/>
+                </a:lnTo>
+                <a:lnTo>
+                  <a:pt x="3547688" y="2971800"/>
+                </a:lnTo>
+                <a:lnTo>
+                  <a:pt x="3537003" y="2971800"/>
+                </a:lnTo>
+                <a:lnTo>
+                  <a:pt x="3526317" y="2971800"/>
+                </a:lnTo>
+                <a:lnTo>
+                  <a:pt x="3515631" y="2971800"/>
+                </a:lnTo>
+                <a:lnTo>
+                  <a:pt x="3504945" y="2971800"/>
+                </a:lnTo>
+                <a:lnTo>
+                  <a:pt x="3494259" y="2971800"/>
+                </a:lnTo>
+                <a:lnTo>
+                  <a:pt x="3483573" y="2971800"/>
+                </a:lnTo>
+                <a:lnTo>
+                  <a:pt x="3472888" y="2971800"/>
+                </a:lnTo>
+                <a:lnTo>
+                  <a:pt x="3462202" y="2971800"/>
+                </a:lnTo>
+                <a:lnTo>
+                  <a:pt x="3451516" y="2971800"/>
+                </a:lnTo>
+                <a:lnTo>
+                  <a:pt x="3440830" y="2971800"/>
+                </a:lnTo>
+                <a:lnTo>
+                  <a:pt x="3430144" y="2971800"/>
+                </a:lnTo>
+                <a:lnTo>
+                  <a:pt x="3419459" y="2971800"/>
+                </a:lnTo>
+                <a:lnTo>
+                  <a:pt x="3408773" y="2971800"/>
+                </a:lnTo>
+                <a:lnTo>
+                  <a:pt x="3398087" y="2971800"/>
+                </a:lnTo>
+                <a:lnTo>
+                  <a:pt x="3387401" y="2971800"/>
+                </a:lnTo>
+                <a:lnTo>
+                  <a:pt x="3376715" y="2971800"/>
+                </a:lnTo>
+                <a:lnTo>
+                  <a:pt x="3366030" y="2971800"/>
+                </a:lnTo>
+                <a:lnTo>
+                  <a:pt x="3355344" y="2971800"/>
+                </a:lnTo>
+                <a:lnTo>
+                  <a:pt x="3344658" y="2971800"/>
+                </a:lnTo>
+                <a:lnTo>
+                  <a:pt x="3333972" y="2971800"/>
+                </a:lnTo>
+                <a:lnTo>
+                  <a:pt x="3323286" y="2971800"/>
+                </a:lnTo>
+                <a:lnTo>
+                  <a:pt x="3312601" y="2971800"/>
+                </a:lnTo>
+                <a:lnTo>
+                  <a:pt x="3301915" y="2971800"/>
+                </a:lnTo>
+                <a:lnTo>
+                  <a:pt x="3291229" y="2971800"/>
+                </a:lnTo>
+                <a:lnTo>
+                  <a:pt x="3280543" y="2971800"/>
+                </a:lnTo>
+                <a:lnTo>
+                  <a:pt x="3269857" y="2971800"/>
+                </a:lnTo>
+                <a:lnTo>
+                  <a:pt x="3259171" y="2971800"/>
+                </a:lnTo>
+                <a:lnTo>
+                  <a:pt x="3248486" y="2971800"/>
+                </a:lnTo>
+                <a:lnTo>
+                  <a:pt x="3237800" y="2971800"/>
+                </a:lnTo>
+                <a:lnTo>
+                  <a:pt x="3227114" y="2971800"/>
+                </a:lnTo>
+                <a:lnTo>
+                  <a:pt x="3216428" y="2971800"/>
+                </a:lnTo>
+                <a:lnTo>
+                  <a:pt x="3205742" y="2971800"/>
+                </a:lnTo>
+                <a:lnTo>
+                  <a:pt x="3195057" y="2971800"/>
+                </a:lnTo>
+                <a:lnTo>
+                  <a:pt x="3184371" y="2971800"/>
+                </a:lnTo>
+                <a:lnTo>
+                  <a:pt x="3173685" y="2971800"/>
+                </a:lnTo>
+                <a:lnTo>
+                  <a:pt x="3162999" y="2971800"/>
+                </a:lnTo>
+                <a:lnTo>
+                  <a:pt x="3152313" y="2971800"/>
+                </a:lnTo>
+                <a:lnTo>
+                  <a:pt x="3141628" y="2971800"/>
+                </a:lnTo>
+                <a:lnTo>
+                  <a:pt x="3130942" y="2971800"/>
+                </a:lnTo>
+                <a:lnTo>
+                  <a:pt x="3120256" y="2971800"/>
+                </a:lnTo>
+                <a:lnTo>
+                  <a:pt x="3109570" y="2971800"/>
+                </a:lnTo>
+                <a:lnTo>
+                  <a:pt x="3098884" y="2971800"/>
+                </a:lnTo>
+                <a:lnTo>
+                  <a:pt x="3088198" y="2971800"/>
+                </a:lnTo>
+                <a:lnTo>
+                  <a:pt x="3077513" y="2971800"/>
+                </a:lnTo>
+                <a:lnTo>
+                  <a:pt x="3066827" y="2971800"/>
+                </a:lnTo>
+                <a:lnTo>
+                  <a:pt x="3056141" y="2971800"/>
+                </a:lnTo>
+                <a:lnTo>
+                  <a:pt x="3045455" y="2971800"/>
+                </a:lnTo>
+                <a:lnTo>
+                  <a:pt x="3034769" y="2971800"/>
+                </a:lnTo>
+                <a:lnTo>
+                  <a:pt x="3024084" y="2971800"/>
+                </a:lnTo>
+                <a:lnTo>
+                  <a:pt x="3013398" y="2971800"/>
+                </a:lnTo>
+                <a:lnTo>
+                  <a:pt x="3002712" y="2971800"/>
+                </a:lnTo>
+                <a:lnTo>
+                  <a:pt x="2992026" y="2971800"/>
+                </a:lnTo>
+                <a:lnTo>
+                  <a:pt x="2981340" y="2971800"/>
+                </a:lnTo>
+                <a:lnTo>
+                  <a:pt x="2970655" y="2971800"/>
+                </a:lnTo>
+                <a:lnTo>
+                  <a:pt x="2959969" y="2971800"/>
+                </a:lnTo>
+                <a:lnTo>
+                  <a:pt x="2949283" y="2971800"/>
+                </a:lnTo>
+                <a:lnTo>
+                  <a:pt x="2938597" y="2971800"/>
+                </a:lnTo>
+                <a:lnTo>
+                  <a:pt x="2927911" y="2971800"/>
+                </a:lnTo>
+                <a:lnTo>
+                  <a:pt x="2917226" y="2971800"/>
+                </a:lnTo>
+                <a:lnTo>
+                  <a:pt x="2906540" y="2971800"/>
+                </a:lnTo>
+                <a:lnTo>
+                  <a:pt x="2895854" y="2971800"/>
+                </a:lnTo>
+                <a:lnTo>
+                  <a:pt x="2885168" y="2971800"/>
+                </a:lnTo>
+                <a:lnTo>
+                  <a:pt x="2874482" y="2971800"/>
+                </a:lnTo>
+                <a:lnTo>
+                  <a:pt x="2863796" y="2971800"/>
+                </a:lnTo>
+                <a:lnTo>
+                  <a:pt x="2853111" y="2971800"/>
+                </a:lnTo>
+                <a:lnTo>
+                  <a:pt x="2842425" y="2971800"/>
+                </a:lnTo>
+                <a:lnTo>
+                  <a:pt x="2831739" y="2971800"/>
+                </a:lnTo>
+                <a:lnTo>
+                  <a:pt x="2821053" y="2971800"/>
+                </a:lnTo>
+                <a:lnTo>
+                  <a:pt x="2810367" y="2971800"/>
+                </a:lnTo>
+                <a:lnTo>
+                  <a:pt x="2799682" y="2971800"/>
+                </a:lnTo>
+                <a:lnTo>
+                  <a:pt x="2788996" y="2971800"/>
+                </a:lnTo>
+                <a:lnTo>
+                  <a:pt x="2778310" y="2971800"/>
+                </a:lnTo>
+                <a:lnTo>
+                  <a:pt x="2767624" y="2971800"/>
+                </a:lnTo>
+                <a:lnTo>
+                  <a:pt x="2756938" y="2971800"/>
+                </a:lnTo>
+                <a:lnTo>
+                  <a:pt x="2746253" y="2971800"/>
+                </a:lnTo>
+                <a:lnTo>
+                  <a:pt x="2735567" y="2971800"/>
+                </a:lnTo>
+                <a:lnTo>
+                  <a:pt x="2724881" y="2971800"/>
+                </a:lnTo>
+                <a:lnTo>
+                  <a:pt x="2714195" y="2971800"/>
+                </a:lnTo>
+                <a:lnTo>
+                  <a:pt x="2703509" y="2971800"/>
+                </a:lnTo>
+                <a:lnTo>
+                  <a:pt x="2692824" y="2971800"/>
+                </a:lnTo>
+                <a:lnTo>
+                  <a:pt x="2682138" y="2971800"/>
+                </a:lnTo>
+                <a:lnTo>
+                  <a:pt x="2671452" y="2971800"/>
+                </a:lnTo>
+                <a:lnTo>
+                  <a:pt x="2660766" y="2971800"/>
+                </a:lnTo>
+                <a:lnTo>
+                  <a:pt x="2650080" y="2971800"/>
+                </a:lnTo>
+                <a:lnTo>
+                  <a:pt x="2639394" y="2971800"/>
+                </a:lnTo>
+                <a:lnTo>
+                  <a:pt x="2628709" y="2971800"/>
+                </a:lnTo>
+                <a:lnTo>
+                  <a:pt x="2618023" y="2971800"/>
+                </a:lnTo>
+                <a:lnTo>
+                  <a:pt x="2607337" y="2971800"/>
+                </a:lnTo>
+                <a:lnTo>
+                  <a:pt x="2596651" y="2971800"/>
+                </a:lnTo>
+                <a:lnTo>
+                  <a:pt x="2585965" y="2971800"/>
+                </a:lnTo>
+                <a:lnTo>
+                  <a:pt x="2575280" y="2971800"/>
+                </a:lnTo>
+                <a:lnTo>
+                  <a:pt x="2564594" y="2971800"/>
+                </a:lnTo>
+                <a:lnTo>
+                  <a:pt x="2553908" y="2971800"/>
+                </a:lnTo>
+                <a:lnTo>
+                  <a:pt x="2543222" y="2971800"/>
+                </a:lnTo>
+                <a:lnTo>
+                  <a:pt x="2532536" y="2971800"/>
+                </a:lnTo>
+                <a:lnTo>
+                  <a:pt x="2521851" y="2971800"/>
+                </a:lnTo>
+                <a:lnTo>
+                  <a:pt x="2511165" y="2971800"/>
+                </a:lnTo>
+                <a:lnTo>
+                  <a:pt x="2500479" y="2971800"/>
+                </a:lnTo>
+                <a:lnTo>
+                  <a:pt x="2489793" y="2971800"/>
+                </a:lnTo>
+                <a:lnTo>
+                  <a:pt x="2479107" y="2971800"/>
+                </a:lnTo>
+                <a:lnTo>
+                  <a:pt x="2468422" y="2971800"/>
+                </a:lnTo>
+                <a:lnTo>
+                  <a:pt x="2457736" y="2971800"/>
+                </a:lnTo>
+                <a:lnTo>
+                  <a:pt x="2447050" y="2971800"/>
+                </a:lnTo>
+                <a:lnTo>
+                  <a:pt x="2436364" y="2971800"/>
+                </a:lnTo>
+                <a:lnTo>
+                  <a:pt x="2425678" y="2971800"/>
+                </a:lnTo>
+                <a:lnTo>
+                  <a:pt x="2414992" y="2971800"/>
+                </a:lnTo>
+                <a:lnTo>
+                  <a:pt x="2404307" y="2971800"/>
+                </a:lnTo>
+                <a:lnTo>
+                  <a:pt x="2393621" y="2971800"/>
+                </a:lnTo>
+                <a:lnTo>
+                  <a:pt x="2382935" y="2971800"/>
+                </a:lnTo>
+                <a:lnTo>
+                  <a:pt x="2372249" y="2971800"/>
+                </a:lnTo>
+                <a:lnTo>
+                  <a:pt x="2361563" y="2971800"/>
+                </a:lnTo>
+                <a:lnTo>
+                  <a:pt x="2350878" y="2971800"/>
+                </a:lnTo>
+                <a:lnTo>
+                  <a:pt x="2340192" y="2971800"/>
+                </a:lnTo>
+                <a:lnTo>
+                  <a:pt x="2329506" y="2971800"/>
+                </a:lnTo>
+                <a:lnTo>
+                  <a:pt x="2318820" y="2971800"/>
+                </a:lnTo>
+                <a:lnTo>
+                  <a:pt x="2308134" y="2971800"/>
+                </a:lnTo>
+                <a:lnTo>
+                  <a:pt x="2297449" y="2971800"/>
+                </a:lnTo>
+                <a:lnTo>
+                  <a:pt x="2286763" y="2971800"/>
+                </a:lnTo>
+                <a:lnTo>
+                  <a:pt x="2276077" y="2971800"/>
+                </a:lnTo>
+                <a:lnTo>
+                  <a:pt x="2265391" y="2971800"/>
+                </a:lnTo>
+                <a:lnTo>
+                  <a:pt x="2254705" y="2971800"/>
+                </a:lnTo>
+                <a:lnTo>
+                  <a:pt x="2244020" y="2971800"/>
+                </a:lnTo>
+                <a:lnTo>
+                  <a:pt x="2233334" y="2971800"/>
+                </a:lnTo>
+                <a:lnTo>
+                  <a:pt x="2222648" y="2971800"/>
+                </a:lnTo>
+                <a:lnTo>
+                  <a:pt x="2211962" y="2971800"/>
+                </a:lnTo>
+                <a:lnTo>
+                  <a:pt x="2201276" y="2971800"/>
+                </a:lnTo>
+                <a:lnTo>
+                  <a:pt x="2190590" y="2971800"/>
+                </a:lnTo>
+                <a:lnTo>
+                  <a:pt x="2179905" y="2971800"/>
+                </a:lnTo>
+                <a:lnTo>
+                  <a:pt x="2169219" y="2971800"/>
+                </a:lnTo>
+                <a:lnTo>
+                  <a:pt x="2158533" y="2971800"/>
+                </a:lnTo>
+                <a:lnTo>
+                  <a:pt x="2147847" y="2971800"/>
+                </a:lnTo>
+                <a:lnTo>
+                  <a:pt x="2137161" y="2971800"/>
+                </a:lnTo>
+                <a:lnTo>
+                  <a:pt x="2126476" y="2971800"/>
+                </a:lnTo>
+                <a:lnTo>
+                  <a:pt x="2115790" y="2971800"/>
+                </a:lnTo>
+                <a:lnTo>
+                  <a:pt x="2105104" y="2971800"/>
+                </a:lnTo>
+                <a:lnTo>
+                  <a:pt x="2094418" y="2971800"/>
+                </a:lnTo>
+                <a:lnTo>
+                  <a:pt x="2083732" y="2971800"/>
+                </a:lnTo>
+                <a:lnTo>
+                  <a:pt x="2073047" y="2971800"/>
+                </a:lnTo>
+                <a:lnTo>
+                  <a:pt x="2062361" y="2971800"/>
+                </a:lnTo>
+                <a:lnTo>
+                  <a:pt x="2051675" y="2971800"/>
+                </a:lnTo>
+                <a:lnTo>
+                  <a:pt x="2040989" y="2971800"/>
+                </a:lnTo>
+                <a:lnTo>
+                  <a:pt x="2030303" y="2971800"/>
+                </a:lnTo>
+                <a:lnTo>
+                  <a:pt x="2019618" y="2971800"/>
+                </a:lnTo>
+                <a:lnTo>
+                  <a:pt x="2008932" y="2971800"/>
+                </a:lnTo>
+                <a:lnTo>
+                  <a:pt x="1998246" y="2971800"/>
+                </a:lnTo>
+                <a:lnTo>
+                  <a:pt x="1987560" y="2971800"/>
+                </a:lnTo>
+                <a:lnTo>
+                  <a:pt x="1976874" y="2971800"/>
+                </a:lnTo>
+                <a:lnTo>
+                  <a:pt x="1966188" y="2971800"/>
+                </a:lnTo>
+                <a:lnTo>
+                  <a:pt x="1955503" y="2971800"/>
+                </a:lnTo>
+                <a:lnTo>
+                  <a:pt x="1944817" y="2971800"/>
+                </a:lnTo>
+                <a:lnTo>
+                  <a:pt x="1934131" y="2971800"/>
+                </a:lnTo>
+                <a:lnTo>
+                  <a:pt x="1923445" y="2971800"/>
+                </a:lnTo>
+                <a:lnTo>
+                  <a:pt x="1912759" y="2971800"/>
+                </a:lnTo>
+                <a:lnTo>
+                  <a:pt x="1902074" y="2971800"/>
+                </a:lnTo>
+                <a:lnTo>
+                  <a:pt x="1891388" y="2971800"/>
+                </a:lnTo>
+                <a:lnTo>
+                  <a:pt x="1880702" y="2971800"/>
+                </a:lnTo>
+                <a:lnTo>
+                  <a:pt x="1870016" y="2971800"/>
+                </a:lnTo>
+                <a:lnTo>
+                  <a:pt x="1859330" y="2971800"/>
+                </a:lnTo>
+                <a:lnTo>
+                  <a:pt x="1848645" y="2971800"/>
+                </a:lnTo>
+                <a:lnTo>
+                  <a:pt x="1837959" y="2971800"/>
+                </a:lnTo>
+                <a:lnTo>
+                  <a:pt x="1827273" y="2971800"/>
+                </a:lnTo>
+                <a:lnTo>
+                  <a:pt x="1816587" y="2971800"/>
+                </a:lnTo>
+                <a:lnTo>
+                  <a:pt x="1805901" y="2971800"/>
+                </a:lnTo>
+                <a:lnTo>
+                  <a:pt x="1795216" y="2971800"/>
+                </a:lnTo>
+                <a:lnTo>
+                  <a:pt x="1784530" y="2971800"/>
+                </a:lnTo>
+                <a:lnTo>
+                  <a:pt x="1773844" y="2971800"/>
+                </a:lnTo>
+                <a:lnTo>
+                  <a:pt x="1763158" y="2971800"/>
+                </a:lnTo>
+                <a:lnTo>
+                  <a:pt x="1752472" y="2971800"/>
+                </a:lnTo>
+                <a:lnTo>
+                  <a:pt x="1741786" y="2971800"/>
+                </a:lnTo>
+                <a:lnTo>
+                  <a:pt x="1731101" y="2971800"/>
+                </a:lnTo>
+                <a:lnTo>
+                  <a:pt x="1720415" y="2971800"/>
+                </a:lnTo>
+                <a:lnTo>
+                  <a:pt x="1709729" y="2971800"/>
+                </a:lnTo>
+                <a:lnTo>
+                  <a:pt x="1699043" y="2971800"/>
+                </a:lnTo>
+                <a:lnTo>
+                  <a:pt x="1688357" y="2971800"/>
+                </a:lnTo>
+                <a:lnTo>
+                  <a:pt x="1677672" y="2971800"/>
+                </a:lnTo>
+                <a:lnTo>
+                  <a:pt x="1666986" y="2971800"/>
+                </a:lnTo>
+                <a:lnTo>
+                  <a:pt x="1656300" y="2971800"/>
+                </a:lnTo>
+                <a:lnTo>
+                  <a:pt x="1645614" y="2971800"/>
+                </a:lnTo>
+                <a:lnTo>
+                  <a:pt x="1634928" y="2971800"/>
+                </a:lnTo>
+                <a:lnTo>
+                  <a:pt x="1624243" y="2971800"/>
+                </a:lnTo>
+                <a:lnTo>
+                  <a:pt x="1613557" y="2971800"/>
+                </a:lnTo>
+                <a:lnTo>
+                  <a:pt x="1602871" y="2971800"/>
+                </a:lnTo>
+                <a:lnTo>
+                  <a:pt x="1592185" y="2971800"/>
+                </a:lnTo>
+                <a:lnTo>
+                  <a:pt x="1581499" y="2971800"/>
+                </a:lnTo>
+                <a:lnTo>
+                  <a:pt x="1570814" y="2971800"/>
+                </a:lnTo>
+                <a:lnTo>
+                  <a:pt x="1560128" y="2971800"/>
+                </a:lnTo>
+                <a:lnTo>
+                  <a:pt x="1549442" y="2971800"/>
+                </a:lnTo>
+                <a:lnTo>
+                  <a:pt x="1538756" y="2971800"/>
+                </a:lnTo>
+                <a:lnTo>
+                  <a:pt x="1528070" y="2971800"/>
+                </a:lnTo>
+                <a:lnTo>
+                  <a:pt x="1517384" y="2971800"/>
+                </a:lnTo>
+                <a:lnTo>
+                  <a:pt x="1506699" y="2971800"/>
+                </a:lnTo>
+                <a:lnTo>
+                  <a:pt x="1496013" y="2971800"/>
+                </a:lnTo>
+                <a:lnTo>
+                  <a:pt x="1485327" y="2971800"/>
+                </a:lnTo>
+                <a:lnTo>
+                  <a:pt x="1474641" y="2971800"/>
+                </a:lnTo>
+                <a:lnTo>
+                  <a:pt x="1463955" y="2971800"/>
+                </a:lnTo>
+                <a:lnTo>
+                  <a:pt x="1453270" y="2971800"/>
+                </a:lnTo>
+                <a:lnTo>
+                  <a:pt x="1442584" y="2971800"/>
+                </a:lnTo>
+                <a:lnTo>
+                  <a:pt x="1431898" y="2971800"/>
+                </a:lnTo>
+                <a:lnTo>
+                  <a:pt x="1421212" y="2971800"/>
+                </a:lnTo>
+                <a:lnTo>
+                  <a:pt x="1410526" y="2971800"/>
+                </a:lnTo>
+                <a:lnTo>
+                  <a:pt x="1399841" y="2971800"/>
+                </a:lnTo>
+                <a:lnTo>
+                  <a:pt x="1389155" y="2971800"/>
+                </a:lnTo>
+                <a:lnTo>
+                  <a:pt x="1378469" y="2971800"/>
+                </a:lnTo>
+                <a:lnTo>
+                  <a:pt x="1367783" y="2971800"/>
+                </a:lnTo>
+                <a:lnTo>
+                  <a:pt x="1357097" y="2971800"/>
+                </a:lnTo>
+                <a:lnTo>
+                  <a:pt x="1346412" y="2971800"/>
+                </a:lnTo>
+                <a:lnTo>
+                  <a:pt x="1335726" y="2971800"/>
+                </a:lnTo>
+                <a:lnTo>
+                  <a:pt x="1325040" y="2971800"/>
+                </a:lnTo>
+                <a:lnTo>
+                  <a:pt x="1314354" y="2971800"/>
+                </a:lnTo>
+                <a:lnTo>
+                  <a:pt x="1303668" y="2971800"/>
+                </a:lnTo>
+                <a:lnTo>
+                  <a:pt x="1292982" y="2971800"/>
+                </a:lnTo>
+                <a:lnTo>
+                  <a:pt x="1282297" y="2971800"/>
+                </a:lnTo>
+                <a:lnTo>
+                  <a:pt x="1271611" y="2971800"/>
+                </a:lnTo>
+                <a:lnTo>
+                  <a:pt x="1260925" y="2971800"/>
+                </a:lnTo>
+                <a:lnTo>
+                  <a:pt x="1250239" y="2971800"/>
+                </a:lnTo>
+                <a:lnTo>
+                  <a:pt x="1239553" y="2971800"/>
+                </a:lnTo>
+                <a:lnTo>
+                  <a:pt x="1228868" y="2971800"/>
+                </a:lnTo>
+                <a:lnTo>
+                  <a:pt x="1218182" y="2971800"/>
+                </a:lnTo>
+                <a:lnTo>
+                  <a:pt x="1207496" y="2971800"/>
+                </a:lnTo>
+                <a:lnTo>
+                  <a:pt x="1196810" y="2971800"/>
+                </a:lnTo>
+                <a:lnTo>
+                  <a:pt x="1186124" y="2971800"/>
+                </a:lnTo>
+                <a:lnTo>
+                  <a:pt x="1175439" y="2971800"/>
+                </a:lnTo>
+                <a:lnTo>
+                  <a:pt x="1164753" y="2971800"/>
+                </a:lnTo>
+                <a:lnTo>
+                  <a:pt x="1154067" y="2971800"/>
+                </a:lnTo>
+                <a:lnTo>
+                  <a:pt x="1143381" y="2971800"/>
+                </a:lnTo>
+                <a:lnTo>
+                  <a:pt x="1132695" y="2971800"/>
+                </a:lnTo>
+                <a:lnTo>
+                  <a:pt x="1122010" y="2971800"/>
+                </a:lnTo>
+                <a:lnTo>
+                  <a:pt x="1111324" y="2971800"/>
+                </a:lnTo>
+                <a:lnTo>
+                  <a:pt x="1100638" y="2971800"/>
+                </a:lnTo>
+                <a:lnTo>
+                  <a:pt x="1089952" y="2971800"/>
+                </a:lnTo>
+                <a:lnTo>
+                  <a:pt x="1079266" y="2971800"/>
+                </a:lnTo>
+                <a:lnTo>
+                  <a:pt x="1068580" y="2971800"/>
+                </a:lnTo>
+                <a:lnTo>
+                  <a:pt x="1057895" y="2971800"/>
+                </a:lnTo>
+                <a:lnTo>
+                  <a:pt x="1047209" y="2971800"/>
+                </a:lnTo>
+                <a:lnTo>
+                  <a:pt x="1036523" y="2971800"/>
+                </a:lnTo>
+                <a:lnTo>
+                  <a:pt x="1025837" y="2971800"/>
+                </a:lnTo>
+                <a:lnTo>
+                  <a:pt x="1015151" y="2971800"/>
+                </a:lnTo>
+                <a:lnTo>
+                  <a:pt x="1004466" y="2971800"/>
+                </a:lnTo>
+                <a:lnTo>
+                  <a:pt x="993780" y="2971800"/>
+                </a:lnTo>
+                <a:lnTo>
+                  <a:pt x="983094" y="2971800"/>
+                </a:lnTo>
+                <a:lnTo>
+                  <a:pt x="972408" y="2971800"/>
+                </a:lnTo>
+                <a:lnTo>
+                  <a:pt x="961722" y="2971800"/>
+                </a:lnTo>
+                <a:lnTo>
+                  <a:pt x="951037" y="2971800"/>
+                </a:lnTo>
+                <a:lnTo>
+                  <a:pt x="940351" y="2971800"/>
+                </a:lnTo>
+                <a:lnTo>
+                  <a:pt x="929665" y="2971800"/>
+                </a:lnTo>
+                <a:lnTo>
+                  <a:pt x="918979" y="2971800"/>
+                </a:lnTo>
+                <a:lnTo>
+                  <a:pt x="908293" y="2971800"/>
+                </a:lnTo>
+                <a:lnTo>
+                  <a:pt x="897608" y="2971800"/>
+                </a:lnTo>
+                <a:lnTo>
+                  <a:pt x="886922" y="2971800"/>
+                </a:lnTo>
+                <a:lnTo>
+                  <a:pt x="876236" y="2971800"/>
+                </a:lnTo>
+                <a:lnTo>
+                  <a:pt x="865550" y="2971800"/>
+                </a:lnTo>
+                <a:lnTo>
+                  <a:pt x="854864" y="2971800"/>
+                </a:lnTo>
+                <a:lnTo>
+                  <a:pt x="844178" y="2971800"/>
+                </a:lnTo>
+                <a:lnTo>
+                  <a:pt x="833493" y="2971800"/>
+                </a:lnTo>
+                <a:lnTo>
+                  <a:pt x="822807" y="2971800"/>
+                </a:lnTo>
+                <a:lnTo>
+                  <a:pt x="812121" y="2971800"/>
+                </a:lnTo>
+                <a:lnTo>
+                  <a:pt x="801435" y="2971800"/>
+                </a:lnTo>
+                <a:lnTo>
+                  <a:pt x="790749" y="2971800"/>
+                </a:lnTo>
+                <a:lnTo>
+                  <a:pt x="780064" y="2971800"/>
+                </a:lnTo>
+                <a:lnTo>
+                  <a:pt x="769378" y="2971800"/>
+                </a:lnTo>
+                <a:lnTo>
+                  <a:pt x="758692" y="2971800"/>
+                </a:lnTo>
+                <a:lnTo>
+                  <a:pt x="748006" y="2971800"/>
+                </a:lnTo>
+                <a:lnTo>
+                  <a:pt x="737320" y="2971800"/>
+                </a:lnTo>
+                <a:lnTo>
+                  <a:pt x="726635" y="2971800"/>
+                </a:lnTo>
+                <a:lnTo>
+                  <a:pt x="715949" y="2971800"/>
+                </a:lnTo>
+                <a:lnTo>
+                  <a:pt x="705263" y="2971800"/>
+                </a:lnTo>
+                <a:lnTo>
+                  <a:pt x="694577" y="2971800"/>
+                </a:lnTo>
+                <a:lnTo>
+                  <a:pt x="683891" y="2971800"/>
+                </a:lnTo>
+                <a:lnTo>
+                  <a:pt x="673206" y="2971800"/>
+                </a:lnTo>
+                <a:lnTo>
+                  <a:pt x="662520" y="2971800"/>
+                </a:lnTo>
+                <a:lnTo>
+                  <a:pt x="651834" y="2971800"/>
+                </a:lnTo>
+                <a:lnTo>
+                  <a:pt x="641148" y="2971800"/>
+                </a:lnTo>
+                <a:lnTo>
+                  <a:pt x="630462" y="2971800"/>
+                </a:lnTo>
+                <a:lnTo>
+                  <a:pt x="619776" y="2971800"/>
+                </a:lnTo>
+                <a:lnTo>
+                  <a:pt x="609091" y="2971800"/>
+                </a:lnTo>
+                <a:lnTo>
+                  <a:pt x="598405" y="2971800"/>
+                </a:lnTo>
+                <a:lnTo>
+                  <a:pt x="587719" y="2971800"/>
+                </a:lnTo>
+                <a:lnTo>
+                  <a:pt x="577033" y="2971800"/>
+                </a:lnTo>
+                <a:lnTo>
+                  <a:pt x="566347" y="2971800"/>
+                </a:lnTo>
+                <a:lnTo>
+                  <a:pt x="555662" y="2971800"/>
+                </a:lnTo>
+                <a:lnTo>
+                  <a:pt x="544976" y="2971800"/>
+                </a:lnTo>
+                <a:lnTo>
+                  <a:pt x="534290" y="2971800"/>
+                </a:lnTo>
+                <a:lnTo>
+                  <a:pt x="523604" y="2971800"/>
+                </a:lnTo>
+                <a:lnTo>
+                  <a:pt x="512918" y="2971800"/>
+                </a:lnTo>
+                <a:lnTo>
+                  <a:pt x="502233" y="2971800"/>
+                </a:lnTo>
+                <a:lnTo>
+                  <a:pt x="491547" y="2971800"/>
+                </a:lnTo>
+                <a:lnTo>
+                  <a:pt x="480861" y="2971800"/>
+                </a:lnTo>
+                <a:lnTo>
+                  <a:pt x="470175" y="2971800"/>
+                </a:lnTo>
+                <a:lnTo>
+                  <a:pt x="459489" y="2971800"/>
+                </a:lnTo>
+                <a:lnTo>
+                  <a:pt x="448804" y="2971800"/>
+                </a:lnTo>
+                <a:lnTo>
+                  <a:pt x="438118" y="2971800"/>
+                </a:lnTo>
+                <a:lnTo>
+                  <a:pt x="427432" y="2971800"/>
+                </a:lnTo>
+                <a:lnTo>
+                  <a:pt x="416746" y="2971800"/>
+                </a:lnTo>
+                <a:lnTo>
+                  <a:pt x="406060" y="2971800"/>
+                </a:lnTo>
+                <a:lnTo>
+                  <a:pt x="395374" y="2971800"/>
+                </a:lnTo>
+                <a:lnTo>
+                  <a:pt x="384689" y="2971800"/>
+                </a:lnTo>
+                <a:lnTo>
+                  <a:pt x="374003" y="2971800"/>
+                </a:lnTo>
+                <a:lnTo>
+                  <a:pt x="363317" y="2971800"/>
+                </a:lnTo>
+                <a:lnTo>
+                  <a:pt x="352631" y="2971800"/>
+                </a:lnTo>
+                <a:lnTo>
+                  <a:pt x="341945" y="2971800"/>
+                </a:lnTo>
+                <a:lnTo>
+                  <a:pt x="331260" y="2971800"/>
+                </a:lnTo>
+                <a:lnTo>
+                  <a:pt x="320574" y="2971800"/>
+                </a:lnTo>
+                <a:lnTo>
+                  <a:pt x="309888" y="2971800"/>
+                </a:lnTo>
+                <a:lnTo>
+                  <a:pt x="299202" y="2971800"/>
+                </a:lnTo>
+                <a:lnTo>
+                  <a:pt x="288516" y="2971800"/>
+                </a:lnTo>
+                <a:lnTo>
+                  <a:pt x="277831" y="2971800"/>
+                </a:lnTo>
+                <a:lnTo>
+                  <a:pt x="267145" y="2971800"/>
+                </a:lnTo>
+                <a:lnTo>
+                  <a:pt x="256459" y="2971800"/>
+                </a:lnTo>
+                <a:lnTo>
+                  <a:pt x="245773" y="2971800"/>
+                </a:lnTo>
+                <a:lnTo>
+                  <a:pt x="235087" y="2971800"/>
+                </a:lnTo>
+                <a:lnTo>
+                  <a:pt x="224402" y="2971800"/>
+                </a:lnTo>
+                <a:lnTo>
+                  <a:pt x="213716" y="2971800"/>
+                </a:lnTo>
+                <a:lnTo>
+                  <a:pt x="203030" y="2971800"/>
+                </a:lnTo>
+                <a:lnTo>
+                  <a:pt x="192344" y="2971800"/>
+                </a:lnTo>
+                <a:lnTo>
+                  <a:pt x="181658" y="2971800"/>
+                </a:lnTo>
+                <a:lnTo>
+                  <a:pt x="170972" y="2971800"/>
+                </a:lnTo>
+                <a:lnTo>
+                  <a:pt x="160287" y="2971800"/>
+                </a:lnTo>
+                <a:lnTo>
+                  <a:pt x="149601" y="2971800"/>
+                </a:lnTo>
+                <a:lnTo>
+                  <a:pt x="138915" y="2971800"/>
+                </a:lnTo>
+                <a:lnTo>
+                  <a:pt x="128229" y="2971800"/>
+                </a:lnTo>
+                <a:lnTo>
+                  <a:pt x="117543" y="2971800"/>
+                </a:lnTo>
+                <a:lnTo>
+                  <a:pt x="106858" y="2971800"/>
+                </a:lnTo>
+                <a:lnTo>
+                  <a:pt x="96172" y="2971800"/>
+                </a:lnTo>
+                <a:lnTo>
+                  <a:pt x="85486" y="2971800"/>
+                </a:lnTo>
+                <a:lnTo>
+                  <a:pt x="74800" y="2971800"/>
+                </a:lnTo>
+                <a:lnTo>
+                  <a:pt x="64114" y="2971800"/>
+                </a:lnTo>
+                <a:lnTo>
+                  <a:pt x="53429" y="2971800"/>
+                </a:lnTo>
+                <a:lnTo>
+                  <a:pt x="42743" y="2971800"/>
+                </a:lnTo>
+                <a:lnTo>
+                  <a:pt x="32057" y="2971800"/>
+                </a:lnTo>
+                <a:lnTo>
+                  <a:pt x="21371" y="2971800"/>
+                </a:lnTo>
+                <a:lnTo>
+                  <a:pt x="10685" y="2971800"/>
+                </a:lnTo>
+                <a:lnTo>
+                  <a:pt x="0" y="2971800"/>
+                </a:lnTo>
+                <a:close/>
+              </a:path>
+            </a:pathLst>
+          </a:custGeom>
+          <a:solidFill>
+            <a:srgbClr val="8EDBD4">
+              <a:alpha val="22000"/>
+            </a:srgbClr>
+          </a:solidFill>
+          <a:ln w="10160">
+            <a:solidFill>
+              <a:srgbClr val="8EDBD4">
+                <a:alpha val="22000"/>
+              </a:srgbClr>
+            </a:solidFill>
+          </a:ln>
+          <a:effectLst/>
+        </p:spPr>
+        <p:txBody>
+          <a:bodyPr rtlCol="0" anchor="ctr"/>
+          <a:lstStyle/>
+          <a:p>
+            <a:pPr algn="ctr"/>
+          </a:p>
+        </p:txBody>
+      </p:sp>
+      <p:sp>
+        <p:nvSpPr>
+          <p:cNvPr id="30" name="C3-E25 polygon 28" descr="sci-ppt:o028"/>
+          <p:cNvSpPr/>
+          <p:nvPr/>
+        </p:nvSpPr>
+        <p:spPr>
+          <a:xfrm>
+            <a:off x="914400" y="1965960"/>
+            <a:ext cx="6400800" cy="2971800"/>
+          </a:xfrm>
+          <a:custGeom>
+            <a:avLst/>
+            <a:gdLst/>
+            <a:ahLst/>
+            <a:cxnLst/>
+            <a:rect l="l" t="t" r="r" b="b"/>
+            <a:pathLst>
+              <a:path w="6400800" h="2971800">
+                <a:moveTo>
+                  <a:pt x="0" y="2971800"/>
+                </a:moveTo>
+                <a:lnTo>
+                  <a:pt x="0" y="0"/>
+                </a:lnTo>
+                <a:lnTo>
+                  <a:pt x="4805405" y="0"/>
+                </a:lnTo>
+                <a:lnTo>
+                  <a:pt x="4805405" y="2971800"/>
+                </a:lnTo>
+                <a:lnTo>
+                  <a:pt x="6400800" y="2971800"/>
+                </a:lnTo>
+              </a:path>
+            </a:pathLst>
+          </a:custGeom>
+          <a:noFill/>
+          <a:ln w="38100">
+            <a:solidFill>
+              <a:srgbClr val="8EDBD4"/>
+            </a:solidFill>
+          </a:ln>
+          <a:effectLst/>
+        </p:spPr>
+        <p:txBody>
+          <a:bodyPr rtlCol="0" anchor="ctr"/>
+          <a:lstStyle/>
+          <a:p>
+            <a:pPr algn="ctr"/>
+          </a:p>
+        </p:txBody>
+      </p:sp>
+      <p:cxnSp>
+        <p:nvCxnSpPr>
+          <p:cNvPr id="31" name="C3-E25 line 29" descr="sci-ppt:o029"/>
+          <p:cNvCxnSpPr/>
+          <p:nvPr/>
+        </p:nvCxnSpPr>
+        <p:spPr>
+          <a:xfrm>
+            <a:off x="1394940" y="1371600"/>
+            <a:ext cx="0" cy="3566160"/>
+          </a:xfrm>
+          <a:prstGeom prst="line">
+            <a:avLst/>
+          </a:prstGeom>
+          <a:ln w="16510">
+            <a:solidFill>
+              <a:srgbClr val="F28BA0"/>
+            </a:solidFill>
+            <a:prstDash val="dash"/>
+          </a:ln>
+          <a:effectLst/>
+        </p:spPr>
+      </p:cxnSp>
+      <p:cxnSp>
+        <p:nvCxnSpPr>
+          <p:cNvPr id="32" name="C3-E25 line 30" descr="sci-ppt:o030"/>
+          <p:cNvCxnSpPr/>
+          <p:nvPr/>
+        </p:nvCxnSpPr>
+        <p:spPr>
+          <a:xfrm>
+            <a:off x="957072" y="1371600"/>
+            <a:ext cx="0" cy="3566160"/>
+          </a:xfrm>
+          <a:prstGeom prst="line">
+            <a:avLst/>
+          </a:prstGeom>
+          <a:ln w="16510">
+            <a:solidFill>
+              <a:srgbClr val="F2B880"/>
+            </a:solidFill>
+            <a:prstDash val="dash"/>
+          </a:ln>
+          <a:effectLst/>
+        </p:spPr>
+      </p:cxnSp>
+      <p:sp>
+        <p:nvSpPr>
+          <p:cNvPr id="33" name="C3-E25 text 31" descr="sci-ppt:o031"/>
           <p:cNvSpPr txBox="1"/>
           <p:nvPr/>
         </p:nvSpPr>
         <p:spPr>
           <a:xfrm>
-            <a:off x="320040" y="4796028"/>
-            <a:ext cx="5715000" cy="246888"/>
+            <a:off x="1532100" y="1428750"/>
+            <a:ext cx="2377440" cy="231648"/>
           </a:xfrm>
           <a:prstGeom prst="rect">
             <a:avLst/>
@@ -3804,7 +7632,7 @@
           <a:effectLst/>
         </p:spPr>
         <p:txBody>
-          <a:bodyPr wrap="square" lIns="27432" rIns="27432" tIns="18288" bIns="18288" anchor="ctr">
+          <a:bodyPr wrap="none" lIns="18288" rIns="18288" tIns="18288" bIns="18288" anchor="t">
             <a:spAutoFit/>
           </a:bodyPr>
           <a:lstStyle/>
@@ -3815,27 +7643,27 @@
               </a:spcAft>
             </a:pPr>
             <a:r>
-              <a:rPr sz="1150" b="0" i="0">
+              <a:rPr sz="1200" b="0" i="0">
                 <a:solidFill>
-                  <a:srgbClr val="B4C7D2"/>
+                  <a:srgbClr val="F28BA0"/>
                 </a:solidFill>
                 <a:latin typeface="Arial"/>
               </a:rPr>
-              <a:t>• t_side, t_axial, t_early, t_return</a:t>
-            </a:r>
-          </a:p>
-        </p:txBody>
-      </p:sp>
-      <p:sp>
-        <p:nvSpPr>
-          <p:cNvPr id="22" name="C3-E25 text 20" descr="sci-ppt:o020"/>
+              <a:t>t_side = aⱼ/c = 3.38 ns</a:t>
+            </a:r>
+          </a:p>
+        </p:txBody>
+      </p:sp>
+      <p:sp>
+        <p:nvSpPr>
+          <p:cNvPr id="34" name="C3-E25 text 32" descr="sci-ppt:o032"/>
           <p:cNvSpPr txBox="1"/>
           <p:nvPr/>
         </p:nvSpPr>
         <p:spPr>
           <a:xfrm>
-            <a:off x="320040" y="5596128"/>
-            <a:ext cx="11430000" cy="292608"/>
+            <a:off x="2702285" y="3154680"/>
+            <a:ext cx="2926080" cy="417576"/>
           </a:xfrm>
           <a:prstGeom prst="rect">
             <a:avLst/>
@@ -3844,7 +7672,7 @@
           <a:effectLst/>
         </p:spPr>
         <p:txBody>
-          <a:bodyPr wrap="square" lIns="27432" rIns="27432" tIns="18288" bIns="18288" anchor="ctr">
+          <a:bodyPr wrap="none" lIns="18288" rIns="18288" tIns="18288" bIns="18288" anchor="t">
             <a:spAutoFit/>
           </a:bodyPr>
           <a:lstStyle/>
@@ -3855,27 +7683,43 @@
               </a:spcAft>
             </a:pPr>
             <a:r>
-              <a:rPr sz="1150" b="0" i="0">
+              <a:rPr sz="1200" b="0" i="0">
                 <a:solidFill>
                   <a:srgbClr val="8EDBD4"/>
                 </a:solidFill>
                 <a:latin typeface="Arial"/>
               </a:rPr>
-              <a:t>Equivalent duration is not a predicted pulse shape</a:t>
-            </a:r>
-          </a:p>
-        </p:txBody>
-      </p:sp>
-      <p:sp>
-        <p:nvSpPr>
-          <p:cNvPr id="23" name="C3-E25 text 21" descr="sci-ppt:o021"/>
+              <a:t>τ_eq = Lⱼ/c = 33.78 ns</a:t>
+            </a:r>
+          </a:p>
+          <a:p>
+            <a:pPr algn="l">
+              <a:spcAft>
+                <a:spcPts val="0"/>
+              </a:spcAft>
+            </a:pPr>
+            <a:r>
+              <a:rPr sz="1200" b="0" i="0">
+                <a:solidFill>
+                  <a:srgbClr val="8EDBD4"/>
+                </a:solidFill>
+                <a:latin typeface="Arial"/>
+              </a:rPr>
+              <a:t>(impulse-equivalent)</a:t>
+            </a:r>
+          </a:p>
+        </p:txBody>
+      </p:sp>
+      <p:sp>
+        <p:nvSpPr>
+          <p:cNvPr id="35" name="C3-E25 text 33" descr="sci-ppt:o033"/>
           <p:cNvSpPr txBox="1"/>
           <p:nvPr/>
         </p:nvSpPr>
         <p:spPr>
           <a:xfrm>
-            <a:off x="320040" y="5870448"/>
-            <a:ext cx="11430000" cy="292608"/>
+            <a:off x="1048512" y="3657600"/>
+            <a:ext cx="1188720" cy="402081"/>
           </a:xfrm>
           <a:prstGeom prst="rect">
             <a:avLst/>
@@ -3884,7 +7728,7 @@
           <a:effectLst/>
         </p:spPr>
         <p:txBody>
-          <a:bodyPr wrap="square" lIns="27432" rIns="27432" tIns="18288" bIns="18288" anchor="ctr">
+          <a:bodyPr wrap="none" lIns="18288" rIns="18288" tIns="18288" bIns="18288" anchor="t">
             <a:spAutoFit/>
           </a:bodyPr>
           <a:lstStyle/>
@@ -3897,25 +7741,73 @@
             <a:r>
               <a:rPr sz="1150" b="0" i="0">
                 <a:solidFill>
-                  <a:srgbClr val="8EDBD4"/>
+                  <a:srgbClr val="F2B880"/>
                 </a:solidFill>
                 <a:latin typeface="Arial"/>
               </a:rPr>
-              <a:t>A free side can release the central pressure earlier</a:t>
-            </a:r>
-          </a:p>
-        </p:txBody>
-      </p:sp>
-      <p:sp>
-        <p:nvSpPr>
-          <p:cNvPr id="24" name="C3-E25 text 22" descr="sci-ppt:o022"/>
+              <a:t>early</a:t>
+            </a:r>
+          </a:p>
+          <a:p>
+            <a:pPr algn="l">
+              <a:spcAft>
+                <a:spcPts val="0"/>
+              </a:spcAft>
+            </a:pPr>
+            <a:r>
+              <a:rPr sz="1150" b="0" i="0">
+                <a:solidFill>
+                  <a:srgbClr val="F2B880"/>
+                </a:solidFill>
+                <a:latin typeface="Arial"/>
+              </a:rPr>
+              <a:t>observation</a:t>
+            </a:r>
+          </a:p>
+        </p:txBody>
+      </p:sp>
+      <p:sp>
+        <p:nvSpPr>
+          <p:cNvPr id="36" name="C3-E25 round_rect 34" descr="sci-ppt:o034"/>
+          <p:cNvSpPr/>
+          <p:nvPr/>
+        </p:nvSpPr>
+        <p:spPr>
+          <a:xfrm>
+            <a:off x="7589520" y="1371600"/>
+            <a:ext cx="4251960" cy="3566160"/>
+          </a:xfrm>
+          <a:prstGeom prst="roundRect">
+            <a:avLst/>
+          </a:prstGeom>
+          <a:solidFill>
+            <a:srgbClr val="213E4B"/>
+          </a:solidFill>
+          <a:ln w="20320">
+            <a:solidFill>
+              <a:srgbClr val="8EDBD4"/>
+            </a:solidFill>
+          </a:ln>
+          <a:effectLst/>
+        </p:spPr>
+        <p:txBody>
+          <a:bodyPr rtlCol="0" anchor="ctr"/>
+          <a:lstStyle/>
+          <a:p>
+            <a:pPr algn="ctr"/>
+          </a:p>
+        </p:txBody>
+      </p:sp>
+      <p:sp>
+        <p:nvSpPr>
+          <p:cNvPr id="37" name="C3-E25 text 35" descr="sci-ppt:o035"/>
           <p:cNvSpPr txBox="1"/>
           <p:nvPr/>
         </p:nvSpPr>
         <p:spPr>
           <a:xfrm>
-            <a:off x="320040" y="6473952"/>
-            <a:ext cx="11430000" cy="256032"/>
+            <a:off x="7699248" y="1426464"/>
+            <a:ext cx="4032504" cy="247142"/>
           </a:xfrm>
           <a:prstGeom prst="rect">
             <a:avLst/>
@@ -3924,7 +7816,359 @@
           <a:effectLst/>
         </p:spPr>
         <p:txBody>
-          <a:bodyPr wrap="square" lIns="27432" rIns="27432" tIns="18288" bIns="18288" anchor="ctr">
+          <a:bodyPr wrap="none" lIns="18288" rIns="18288" tIns="18288" bIns="18288" anchor="t">
+            <a:spAutoFit/>
+          </a:bodyPr>
+          <a:lstStyle/>
+          <a:p>
+            <a:pPr algn="l">
+              <a:spcAft>
+                <a:spcPts val="0"/>
+              </a:spcAft>
+            </a:pPr>
+            <a:r>
+              <a:rPr sz="1300" b="1" i="0">
+                <a:solidFill>
+                  <a:srgbClr val="8EDBD4"/>
+                </a:solidFill>
+                <a:latin typeface="Arial"/>
+              </a:rPr>
+              <a:t>Finite momentum, finite duration</a:t>
+            </a:r>
+          </a:p>
+        </p:txBody>
+      </p:sp>
+      <p:sp>
+        <p:nvSpPr>
+          <p:cNvPr id="38" name="C3-E25 text 36" descr="sci-ppt:o036"/>
+          <p:cNvSpPr txBox="1"/>
+          <p:nvPr/>
+        </p:nvSpPr>
+        <p:spPr>
+          <a:xfrm>
+            <a:off x="7726679" y="1828800"/>
+            <a:ext cx="4023360" cy="231648"/>
+          </a:xfrm>
+          <a:prstGeom prst="rect">
+            <a:avLst/>
+          </a:prstGeom>
+          <a:noFill/>
+          <a:effectLst/>
+        </p:spPr>
+        <p:txBody>
+          <a:bodyPr wrap="none" lIns="18288" rIns="18288" tIns="18288" bIns="18288" anchor="t">
+            <a:spAutoFit/>
+          </a:bodyPr>
+          <a:lstStyle/>
+          <a:p>
+            <a:pPr algn="l">
+              <a:spcAft>
+                <a:spcPts val="0"/>
+              </a:spcAft>
+            </a:pPr>
+            <a:r>
+              <a:rPr sz="1200" b="1" i="0">
+                <a:solidFill>
+                  <a:srgbClr val="E7F0F3"/>
+                </a:solidFill>
+                <a:latin typeface="Arial"/>
+              </a:rPr>
+              <a:t>Pᵢₙ = mⱼ Uⱼ = ρA_jL_jUⱼ = 1.2533×10⁻¹⁰ N s</a:t>
+            </a:r>
+          </a:p>
+        </p:txBody>
+      </p:sp>
+      <p:sp>
+        <p:nvSpPr>
+          <p:cNvPr id="39" name="C3-E25 text 37" descr="sci-ppt:o037"/>
+          <p:cNvSpPr txBox="1"/>
+          <p:nvPr/>
+        </p:nvSpPr>
+        <p:spPr>
+          <a:xfrm>
+            <a:off x="7726679" y="2468880"/>
+            <a:ext cx="4023360" cy="231648"/>
+          </a:xfrm>
+          <a:prstGeom prst="rect">
+            <a:avLst/>
+          </a:prstGeom>
+          <a:noFill/>
+          <a:effectLst/>
+        </p:spPr>
+        <p:txBody>
+          <a:bodyPr wrap="none" lIns="18288" rIns="18288" tIns="18288" bIns="18288" anchor="t">
+            <a:spAutoFit/>
+          </a:bodyPr>
+          <a:lstStyle/>
+          <a:p>
+            <a:pPr algn="l">
+              <a:spcAft>
+                <a:spcPts val="0"/>
+              </a:spcAft>
+            </a:pPr>
+            <a:r>
+              <a:rPr sz="1200" b="1" i="0">
+                <a:solidFill>
+                  <a:srgbClr val="F2B880"/>
+                </a:solidFill>
+                <a:latin typeface="Arial"/>
+              </a:rPr>
+              <a:t>(ρcUⱼ) Aⱼ τ_eq = mⱼ Uⱼ ⇒ τ_eq = Lⱼ / c</a:t>
+            </a:r>
+          </a:p>
+        </p:txBody>
+      </p:sp>
+      <p:sp>
+        <p:nvSpPr>
+          <p:cNvPr id="40" name="C3-E25 text 38" descr="sci-ppt:o038"/>
+          <p:cNvSpPr txBox="1"/>
+          <p:nvPr/>
+        </p:nvSpPr>
+        <p:spPr>
+          <a:xfrm>
+            <a:off x="7927848" y="3108960"/>
+            <a:ext cx="3822192" cy="402081"/>
+          </a:xfrm>
+          <a:prstGeom prst="rect">
+            <a:avLst/>
+          </a:prstGeom>
+          <a:noFill/>
+          <a:effectLst/>
+        </p:spPr>
+        <p:txBody>
+          <a:bodyPr wrap="none" lIns="18288" rIns="18288" tIns="18288" bIns="18288" anchor="t">
+            <a:spAutoFit/>
+          </a:bodyPr>
+          <a:lstStyle/>
+          <a:p>
+            <a:pPr algn="l">
+              <a:spcAft>
+                <a:spcPts val="0"/>
+              </a:spcAft>
+            </a:pPr>
+            <a:r>
+              <a:rPr sz="1150" b="0" i="0">
+                <a:solidFill>
+                  <a:srgbClr val="E7F0F3"/>
+                </a:solidFill>
+                <a:latin typeface="Arial"/>
+              </a:rPr>
+              <a:t>A side-release wave reaches the centre after</a:t>
+            </a:r>
+          </a:p>
+          <a:p>
+            <a:pPr algn="l">
+              <a:spcAft>
+                <a:spcPts val="0"/>
+              </a:spcAft>
+            </a:pPr>
+            <a:r>
+              <a:rPr sz="1150" b="0" i="0">
+                <a:solidFill>
+                  <a:srgbClr val="E7F0F3"/>
+                </a:solidFill>
+                <a:latin typeface="Arial"/>
+              </a:rPr>
+              <a:t>t_side, 10 times sooner than τ_eq.</a:t>
+            </a:r>
+          </a:p>
+        </p:txBody>
+      </p:sp>
+      <p:sp>
+        <p:nvSpPr>
+          <p:cNvPr id="41" name="C3-E25 ellipse 39" descr="sci-ppt:o039"/>
+          <p:cNvSpPr/>
+          <p:nvPr/>
+        </p:nvSpPr>
+        <p:spPr>
+          <a:xfrm>
+            <a:off x="7758683" y="3158363"/>
+            <a:ext cx="82296" cy="82296"/>
+          </a:xfrm>
+          <a:prstGeom prst="ellipse">
+            <a:avLst/>
+          </a:prstGeom>
+          <a:solidFill>
+            <a:srgbClr val="8EDBD4"/>
+          </a:solidFill>
+          <a:ln w="12700">
+            <a:solidFill>
+              <a:srgbClr val="8EDBD4"/>
+            </a:solidFill>
+          </a:ln>
+          <a:effectLst/>
+        </p:spPr>
+        <p:txBody>
+          <a:bodyPr rtlCol="0" anchor="ctr"/>
+          <a:lstStyle/>
+          <a:p>
+            <a:pPr algn="ctr"/>
+          </a:p>
+        </p:txBody>
+      </p:sp>
+      <p:sp>
+        <p:nvSpPr>
+          <p:cNvPr id="42" name="C3-E25 text 40" descr="sci-ppt:o040"/>
+          <p:cNvSpPr txBox="1"/>
+          <p:nvPr/>
+        </p:nvSpPr>
+        <p:spPr>
+          <a:xfrm>
+            <a:off x="7927848" y="3556761"/>
+            <a:ext cx="3822192" cy="402081"/>
+          </a:xfrm>
+          <a:prstGeom prst="rect">
+            <a:avLst/>
+          </a:prstGeom>
+          <a:noFill/>
+          <a:effectLst/>
+        </p:spPr>
+        <p:txBody>
+          <a:bodyPr wrap="none" lIns="18288" rIns="18288" tIns="18288" bIns="18288" anchor="t">
+            <a:spAutoFit/>
+          </a:bodyPr>
+          <a:lstStyle/>
+          <a:p>
+            <a:pPr algn="l">
+              <a:spcAft>
+                <a:spcPts val="0"/>
+              </a:spcAft>
+            </a:pPr>
+            <a:r>
+              <a:rPr sz="1150" b="0" i="0">
+                <a:solidFill>
+                  <a:srgbClr val="E7F0F3"/>
+                </a:solidFill>
+                <a:latin typeface="Arial"/>
+              </a:rPr>
+              <a:t>The 47 MPa scale only holds for t_early ≪</a:t>
+            </a:r>
+          </a:p>
+          <a:p>
+            <a:pPr algn="l">
+              <a:spcAft>
+                <a:spcPts val="0"/>
+              </a:spcAft>
+            </a:pPr>
+            <a:r>
+              <a:rPr sz="1150" b="0" i="0">
+                <a:solidFill>
+                  <a:srgbClr val="E7F0F3"/>
+                </a:solidFill>
+                <a:latin typeface="Arial"/>
+              </a:rPr>
+              <a:t>min(t_side, tₐₓᵢₐₗ, tᵣₑₜᵤᵣₙ).</a:t>
+            </a:r>
+          </a:p>
+        </p:txBody>
+      </p:sp>
+      <p:sp>
+        <p:nvSpPr>
+          <p:cNvPr id="43" name="C3-E25 ellipse 41" descr="sci-ppt:o041"/>
+          <p:cNvSpPr/>
+          <p:nvPr/>
+        </p:nvSpPr>
+        <p:spPr>
+          <a:xfrm>
+            <a:off x="7758683" y="3606164"/>
+            <a:ext cx="82296" cy="82296"/>
+          </a:xfrm>
+          <a:prstGeom prst="ellipse">
+            <a:avLst/>
+          </a:prstGeom>
+          <a:solidFill>
+            <a:srgbClr val="8EDBD4"/>
+          </a:solidFill>
+          <a:ln w="12700">
+            <a:solidFill>
+              <a:srgbClr val="8EDBD4"/>
+            </a:solidFill>
+          </a:ln>
+          <a:effectLst/>
+        </p:spPr>
+        <p:txBody>
+          <a:bodyPr rtlCol="0" anchor="ctr"/>
+          <a:lstStyle/>
+          <a:p>
+            <a:pPr algn="ctr"/>
+          </a:p>
+        </p:txBody>
+      </p:sp>
+      <p:sp>
+        <p:nvSpPr>
+          <p:cNvPr id="44" name="C3-E25 text 42" descr="sci-ppt:o042"/>
+          <p:cNvSpPr txBox="1"/>
+          <p:nvPr/>
+        </p:nvSpPr>
+        <p:spPr>
+          <a:xfrm>
+            <a:off x="914400" y="5486400"/>
+            <a:ext cx="10972800" cy="433070"/>
+          </a:xfrm>
+          <a:prstGeom prst="rect">
+            <a:avLst/>
+          </a:prstGeom>
+          <a:noFill/>
+          <a:effectLst/>
+        </p:spPr>
+        <p:txBody>
+          <a:bodyPr wrap="none" lIns="18288" rIns="18288" tIns="18288" bIns="18288" anchor="t">
+            <a:spAutoFit/>
+          </a:bodyPr>
+          <a:lstStyle/>
+          <a:p>
+            <a:pPr algn="l">
+              <a:spcAft>
+                <a:spcPts val="0"/>
+              </a:spcAft>
+            </a:pPr>
+            <a:r>
+              <a:rPr sz="1250" b="0" i="0">
+                <a:solidFill>
+                  <a:srgbClr val="E7F0F3"/>
+                </a:solidFill>
+                <a:latin typeface="Arial"/>
+              </a:rPr>
+              <a:t>The very large early pressure belongs to a rectangle of equal impulse that the real jet cannot sustain: its duration is limited by</a:t>
+            </a:r>
+          </a:p>
+          <a:p>
+            <a:pPr algn="l">
+              <a:spcAft>
+                <a:spcPts val="0"/>
+              </a:spcAft>
+            </a:pPr>
+            <a:r>
+              <a:rPr sz="1250" b="0" i="0">
+                <a:solidFill>
+                  <a:srgbClr val="E7F0F3"/>
+                </a:solidFill>
+                <a:latin typeface="Arial"/>
+              </a:rPr>
+              <a:t>finite length and free sides.</a:t>
+            </a:r>
+          </a:p>
+        </p:txBody>
+      </p:sp>
+      <p:sp>
+        <p:nvSpPr>
+          <p:cNvPr id="45" name="C3-E25 text 43" descr="sci-ppt:o043"/>
+          <p:cNvSpPr txBox="1"/>
+          <p:nvPr/>
+        </p:nvSpPr>
+        <p:spPr>
+          <a:xfrm>
+            <a:off x="320040" y="6510528"/>
+            <a:ext cx="11521440" cy="200660"/>
+          </a:xfrm>
+          <a:prstGeom prst="rect">
+            <a:avLst/>
+          </a:prstGeom>
+          <a:noFill/>
+          <a:effectLst/>
+        </p:spPr>
+        <p:txBody>
+          <a:bodyPr wrap="none" lIns="18288" rIns="18288" tIns="18288" bIns="18288" anchor="t">
             <a:spAutoFit/>
           </a:bodyPr>
           <a:lstStyle/>
@@ -3941,7 +8185,7 @@
                 </a:solidFill>
                 <a:latin typeface="Arial"/>
               </a:rPr>
-              <a:t>Model schematic; geometry is not to scale.</a:t>
+              <a:t>Early-impact duration conditions of Eq. C3-E25 (c = 1480 m/s, Lⱼ = 50 µm, aⱼ = 5 µm).</a:t>
             </a:r>
           </a:p>
         </p:txBody>
